--- a/Disaster_Relief_Distribution_Optimizer_Presentation.pptx
+++ b/Disaster_Relief_Distribution_Optimizer_Presentation.pptx
@@ -13,7 +13,8 @@
     <p:sldId id="261" r:id="rId7"/>
     <p:sldId id="262" r:id="rId8"/>
     <p:sldId id="263" r:id="rId9"/>
-    <p:sldId id="264" r:id="rId10"/>
+    <p:sldId id="265" r:id="rId10"/>
+    <p:sldId id="264" r:id="rId11"/>
   </p:sldIdLst>
   <p:sldSz cx="12192000" cy="6858000"/>
   <p:notesSz cx="6858000" cy="9144000"/>
@@ -310,7 +311,7 @@
           <a:p>
             <a:fld id="{5BCAD085-E8A6-8845-BD4E-CB4CCA059FC4}" type="datetimeFigureOut">
               <a:rPr lang="en-US" smtClean="0"/>
-              <a:t>10/29/2026</a:t>
+              <a:t>10/30/2026</a:t>
             </a:fld>
             <a:endParaRPr lang="en-US"/>
           </a:p>
@@ -478,7 +479,7 @@
           <a:p>
             <a:fld id="{5BCAD085-E8A6-8845-BD4E-CB4CCA059FC4}" type="datetimeFigureOut">
               <a:rPr lang="en-US" smtClean="0"/>
-              <a:t>10/29/2026</a:t>
+              <a:t>10/30/2026</a:t>
             </a:fld>
             <a:endParaRPr lang="en-US"/>
           </a:p>
@@ -656,7 +657,7 @@
           <a:p>
             <a:fld id="{5BCAD085-E8A6-8845-BD4E-CB4CCA059FC4}" type="datetimeFigureOut">
               <a:rPr lang="en-US" smtClean="0"/>
-              <a:t>10/29/2026</a:t>
+              <a:t>10/30/2026</a:t>
             </a:fld>
             <a:endParaRPr lang="en-US"/>
           </a:p>
@@ -824,7 +825,7 @@
           <a:p>
             <a:fld id="{5BCAD085-E8A6-8845-BD4E-CB4CCA059FC4}" type="datetimeFigureOut">
               <a:rPr lang="en-US" smtClean="0"/>
-              <a:t>10/29/2026</a:t>
+              <a:t>10/30/2026</a:t>
             </a:fld>
             <a:endParaRPr lang="en-US"/>
           </a:p>
@@ -1069,7 +1070,7 @@
           <a:p>
             <a:fld id="{5BCAD085-E8A6-8845-BD4E-CB4CCA059FC4}" type="datetimeFigureOut">
               <a:rPr lang="en-US" smtClean="0"/>
-              <a:t>10/29/2026</a:t>
+              <a:t>10/30/2026</a:t>
             </a:fld>
             <a:endParaRPr lang="en-US"/>
           </a:p>
@@ -1354,7 +1355,7 @@
           <a:p>
             <a:fld id="{5BCAD085-E8A6-8845-BD4E-CB4CCA059FC4}" type="datetimeFigureOut">
               <a:rPr lang="en-US" smtClean="0"/>
-              <a:t>10/29/2026</a:t>
+              <a:t>10/30/2026</a:t>
             </a:fld>
             <a:endParaRPr lang="en-US"/>
           </a:p>
@@ -1773,7 +1774,7 @@
           <a:p>
             <a:fld id="{5BCAD085-E8A6-8845-BD4E-CB4CCA059FC4}" type="datetimeFigureOut">
               <a:rPr lang="en-US" smtClean="0"/>
-              <a:t>10/29/2026</a:t>
+              <a:t>10/30/2026</a:t>
             </a:fld>
             <a:endParaRPr lang="en-US"/>
           </a:p>
@@ -1890,7 +1891,7 @@
           <a:p>
             <a:fld id="{5BCAD085-E8A6-8845-BD4E-CB4CCA059FC4}" type="datetimeFigureOut">
               <a:rPr lang="en-US" smtClean="0"/>
-              <a:t>10/29/2026</a:t>
+              <a:t>10/30/2026</a:t>
             </a:fld>
             <a:endParaRPr lang="en-US"/>
           </a:p>
@@ -1985,7 +1986,7 @@
           <a:p>
             <a:fld id="{5BCAD085-E8A6-8845-BD4E-CB4CCA059FC4}" type="datetimeFigureOut">
               <a:rPr lang="en-US" smtClean="0"/>
-              <a:t>10/29/2026</a:t>
+              <a:t>10/30/2026</a:t>
             </a:fld>
             <a:endParaRPr lang="en-US"/>
           </a:p>
@@ -2260,7 +2261,7 @@
           <a:p>
             <a:fld id="{5BCAD085-E8A6-8845-BD4E-CB4CCA059FC4}" type="datetimeFigureOut">
               <a:rPr lang="en-US" smtClean="0"/>
-              <a:t>10/29/2026</a:t>
+              <a:t>10/30/2026</a:t>
             </a:fld>
             <a:endParaRPr lang="en-US"/>
           </a:p>
@@ -2512,7 +2513,7 @@
           <a:p>
             <a:fld id="{5BCAD085-E8A6-8845-BD4E-CB4CCA059FC4}" type="datetimeFigureOut">
               <a:rPr lang="en-US" smtClean="0"/>
-              <a:t>10/29/2026</a:t>
+              <a:t>10/30/2026</a:t>
             </a:fld>
             <a:endParaRPr lang="en-US"/>
           </a:p>
@@ -2723,7 +2724,7 @@
           <a:p>
             <a:fld id="{5BCAD085-E8A6-8845-BD4E-CB4CCA059FC4}" type="datetimeFigureOut">
               <a:rPr lang="en-US" smtClean="0"/>
-              <a:t>10/29/2026</a:t>
+              <a:t>10/30/2026</a:t>
             </a:fld>
             <a:endParaRPr lang="en-US"/>
           </a:p>
@@ -3509,6 +3510,1946 @@
 </p:sld>
 </file>
 
+<file path=ppt/slides/slide10.xml><?xml version="1.0" encoding="utf-8"?>
+<p:sld xmlns:a="http://schemas.openxmlformats.org/drawingml/2006/main" xmlns:r="http://schemas.openxmlformats.org/officeDocument/2006/relationships" xmlns:p="http://schemas.openxmlformats.org/presentationml/2006/main">
+  <p:cSld>
+    <p:bg>
+      <p:bgPr>
+        <a:solidFill>
+          <a:srgbClr val="EFF5FC"/>
+        </a:solidFill>
+        <a:effectLst/>
+      </p:bgPr>
+    </p:bg>
+    <p:spTree>
+      <p:nvGrpSpPr>
+        <p:cNvPr id="1" name=""/>
+        <p:cNvGrpSpPr/>
+        <p:nvPr/>
+      </p:nvGrpSpPr>
+      <p:grpSpPr>
+        <a:xfrm>
+          <a:off x="0" y="0"/>
+          <a:ext cx="0" cy="0"/>
+          <a:chOff x="0" y="0"/>
+          <a:chExt cx="0" cy="0"/>
+        </a:xfrm>
+      </p:grpSpPr>
+      <p:sp>
+        <p:nvSpPr>
+          <p:cNvPr id="2" name="Rectangle 1"/>
+          <p:cNvSpPr/>
+          <p:nvPr/>
+        </p:nvSpPr>
+        <p:spPr>
+          <a:xfrm>
+            <a:off x="0" y="0"/>
+            <a:ext cx="12191695" cy="1874519"/>
+          </a:xfrm>
+          <a:prstGeom prst="rect">
+            <a:avLst/>
+          </a:prstGeom>
+          <a:solidFill>
+            <a:srgbClr val="132642"/>
+          </a:solidFill>
+          <a:ln>
+            <a:noFill/>
+          </a:ln>
+        </p:spPr>
+        <p:style>
+          <a:lnRef idx="1">
+            <a:schemeClr val="accent1"/>
+          </a:lnRef>
+          <a:fillRef idx="3">
+            <a:schemeClr val="accent1"/>
+          </a:fillRef>
+          <a:effectRef idx="2">
+            <a:schemeClr val="accent1"/>
+          </a:effectRef>
+          <a:fontRef idx="minor">
+            <a:schemeClr val="lt1"/>
+          </a:fontRef>
+        </p:style>
+        <p:txBody>
+          <a:bodyPr rtlCol="0" anchor="ctr"/>
+          <a:lstStyle/>
+          <a:p>
+            <a:pPr algn="ctr"/>
+            <a:endParaRPr/>
+          </a:p>
+        </p:txBody>
+      </p:sp>
+      <p:sp>
+        <p:nvSpPr>
+          <p:cNvPr id="3" name="Rectangle 2"/>
+          <p:cNvSpPr/>
+          <p:nvPr/>
+        </p:nvSpPr>
+        <p:spPr>
+          <a:xfrm>
+            <a:off x="0" y="0"/>
+            <a:ext cx="164592" cy="6858000"/>
+          </a:xfrm>
+          <a:prstGeom prst="rect">
+            <a:avLst/>
+          </a:prstGeom>
+          <a:solidFill>
+            <a:srgbClr val="1F9D94"/>
+          </a:solidFill>
+          <a:ln>
+            <a:noFill/>
+          </a:ln>
+        </p:spPr>
+        <p:style>
+          <a:lnRef idx="1">
+            <a:schemeClr val="accent1"/>
+          </a:lnRef>
+          <a:fillRef idx="3">
+            <a:schemeClr val="accent1"/>
+          </a:fillRef>
+          <a:effectRef idx="2">
+            <a:schemeClr val="accent1"/>
+          </a:effectRef>
+          <a:fontRef idx="minor">
+            <a:schemeClr val="lt1"/>
+          </a:fontRef>
+        </p:style>
+        <p:txBody>
+          <a:bodyPr rtlCol="0" anchor="ctr"/>
+          <a:lstStyle/>
+          <a:p>
+            <a:pPr algn="ctr"/>
+            <a:endParaRPr/>
+          </a:p>
+        </p:txBody>
+      </p:sp>
+      <p:sp>
+        <p:nvSpPr>
+          <p:cNvPr id="4" name="Rounded Rectangle 3"/>
+          <p:cNvSpPr/>
+          <p:nvPr/>
+        </p:nvSpPr>
+        <p:spPr>
+          <a:xfrm>
+            <a:off x="713232" y="411480"/>
+            <a:ext cx="3182112" cy="310896"/>
+          </a:xfrm>
+          <a:prstGeom prst="roundRect">
+            <a:avLst>
+              <a:gd name="adj" fmla="val 12000"/>
+            </a:avLst>
+          </a:prstGeom>
+          <a:solidFill>
+            <a:srgbClr val="1F9D94"/>
+          </a:solidFill>
+          <a:ln>
+            <a:noFill/>
+          </a:ln>
+        </p:spPr>
+        <p:style>
+          <a:lnRef idx="1">
+            <a:schemeClr val="accent1"/>
+          </a:lnRef>
+          <a:fillRef idx="3">
+            <a:schemeClr val="accent1"/>
+          </a:fillRef>
+          <a:effectRef idx="2">
+            <a:schemeClr val="accent1"/>
+          </a:effectRef>
+          <a:fontRef idx="minor">
+            <a:schemeClr val="lt1"/>
+          </a:fontRef>
+        </p:style>
+        <p:txBody>
+          <a:bodyPr rtlCol="0" anchor="ctr"/>
+          <a:lstStyle/>
+          <a:p>
+            <a:pPr algn="ctr"/>
+            <a:endParaRPr/>
+          </a:p>
+        </p:txBody>
+      </p:sp>
+      <p:sp>
+        <p:nvSpPr>
+          <p:cNvPr id="5" name="TextBox 4"/>
+          <p:cNvSpPr txBox="1"/>
+          <p:nvPr/>
+        </p:nvSpPr>
+        <p:spPr>
+          <a:xfrm>
+            <a:off x="777240" y="425196"/>
+            <a:ext cx="3054096" cy="265176"/>
+          </a:xfrm>
+          <a:prstGeom prst="rect">
+            <a:avLst/>
+          </a:prstGeom>
+          <a:noFill/>
+        </p:spPr>
+        <p:txBody>
+          <a:bodyPr wrap="square" lIns="9144" tIns="9144" rIns="9144" bIns="9144" anchor="ctr">
+            <a:spAutoFit/>
+          </a:bodyPr>
+          <a:lstStyle/>
+          <a:p>
+            <a:pPr algn="ctr"/>
+            <a:r>
+              <a:rPr sz="1000" b="1" i="0">
+                <a:solidFill>
+                  <a:srgbClr val="FFFFFF"/>
+                </a:solidFill>
+                <a:latin typeface="Aptos"/>
+              </a:rPr>
+              <a:t>GROUP 14  •  DISASTER MANAGEMENT</a:t>
+            </a:r>
+          </a:p>
+        </p:txBody>
+      </p:sp>
+      <p:sp>
+        <p:nvSpPr>
+          <p:cNvPr id="6" name="TextBox 5"/>
+          <p:cNvSpPr txBox="1"/>
+          <p:nvPr/>
+        </p:nvSpPr>
+        <p:spPr>
+          <a:xfrm>
+            <a:off x="713232" y="841248"/>
+            <a:ext cx="5852160" cy="658368"/>
+          </a:xfrm>
+          <a:prstGeom prst="rect">
+            <a:avLst/>
+          </a:prstGeom>
+          <a:noFill/>
+        </p:spPr>
+        <p:txBody>
+          <a:bodyPr wrap="square" lIns="36576" tIns="36576" rIns="36576" bIns="36576" anchor="ctr">
+            <a:spAutoFit/>
+          </a:bodyPr>
+          <a:lstStyle/>
+          <a:p>
+            <a:pPr algn="l"/>
+            <a:r>
+              <a:rPr sz="3400" b="1" i="0">
+                <a:solidFill>
+                  <a:srgbClr val="FFFFFF"/>
+                </a:solidFill>
+                <a:latin typeface="Aptos"/>
+              </a:rPr>
+              <a:t>Thank You</a:t>
+            </a:r>
+          </a:p>
+        </p:txBody>
+      </p:sp>
+      <p:sp>
+        <p:nvSpPr>
+          <p:cNvPr id="7" name="TextBox 6"/>
+          <p:cNvSpPr txBox="1"/>
+          <p:nvPr/>
+        </p:nvSpPr>
+        <p:spPr>
+          <a:xfrm>
+            <a:off x="749808" y="1463040"/>
+            <a:ext cx="5303520" cy="274320"/>
+          </a:xfrm>
+          <a:prstGeom prst="rect">
+            <a:avLst/>
+          </a:prstGeom>
+          <a:noFill/>
+        </p:spPr>
+        <p:txBody>
+          <a:bodyPr wrap="square" lIns="36576" tIns="36576" rIns="36576" bIns="36576" anchor="ctr">
+            <a:spAutoFit/>
+          </a:bodyPr>
+          <a:lstStyle/>
+          <a:p>
+            <a:pPr algn="l"/>
+            <a:r>
+              <a:rPr sz="1500" b="0" i="0">
+                <a:solidFill>
+                  <a:srgbClr val="CCDBF1"/>
+                </a:solidFill>
+                <a:latin typeface="Aptos"/>
+              </a:rPr>
+              <a:t>Questions &amp; Discussion</a:t>
+            </a:r>
+          </a:p>
+        </p:txBody>
+      </p:sp>
+      <p:sp>
+        <p:nvSpPr>
+          <p:cNvPr id="8" name="TextBox 7"/>
+          <p:cNvSpPr txBox="1"/>
+          <p:nvPr/>
+        </p:nvSpPr>
+        <p:spPr>
+          <a:xfrm>
+            <a:off x="713232" y="2029968"/>
+            <a:ext cx="2743200" cy="320040"/>
+          </a:xfrm>
+          <a:prstGeom prst="rect">
+            <a:avLst/>
+          </a:prstGeom>
+          <a:noFill/>
+        </p:spPr>
+        <p:txBody>
+          <a:bodyPr wrap="square" lIns="36576" tIns="36576" rIns="36576" bIns="36576" anchor="ctr">
+            <a:spAutoFit/>
+          </a:bodyPr>
+          <a:lstStyle/>
+          <a:p>
+            <a:pPr algn="l"/>
+            <a:r>
+              <a:rPr sz="1700" b="1" i="0">
+                <a:solidFill>
+                  <a:srgbClr val="132642"/>
+                </a:solidFill>
+                <a:latin typeface="Aptos"/>
+              </a:rPr>
+              <a:t>PROJECT TEAM</a:t>
+            </a:r>
+          </a:p>
+        </p:txBody>
+      </p:sp>
+      <p:sp>
+        <p:nvSpPr>
+          <p:cNvPr id="9" name="TextBox 8"/>
+          <p:cNvSpPr txBox="1"/>
+          <p:nvPr/>
+        </p:nvSpPr>
+        <p:spPr>
+          <a:xfrm>
+            <a:off x="731520" y="2340864"/>
+            <a:ext cx="7132320" cy="274320"/>
+          </a:xfrm>
+          <a:prstGeom prst="rect">
+            <a:avLst/>
+          </a:prstGeom>
+          <a:noFill/>
+        </p:spPr>
+        <p:txBody>
+          <a:bodyPr wrap="square" lIns="36576" tIns="36576" rIns="36576" bIns="36576" anchor="ctr">
+            <a:spAutoFit/>
+          </a:bodyPr>
+          <a:lstStyle/>
+          <a:p>
+            <a:pPr algn="l"/>
+            <a:r>
+              <a:rPr sz="1200" b="0" i="0">
+                <a:solidFill>
+                  <a:srgbClr val="53657C"/>
+                </a:solidFill>
+                <a:latin typeface="Aptos"/>
+              </a:rPr>
+              <a:t>Disaster Relief Distribution Optimizer</a:t>
+            </a:r>
+          </a:p>
+        </p:txBody>
+      </p:sp>
+      <p:sp>
+        <p:nvSpPr>
+          <p:cNvPr id="10" name="TextBox 9"/>
+          <p:cNvSpPr txBox="1"/>
+          <p:nvPr/>
+        </p:nvSpPr>
+        <p:spPr>
+          <a:xfrm>
+            <a:off x="6400800" y="2029968"/>
+            <a:ext cx="4937760" cy="320040"/>
+          </a:xfrm>
+          <a:prstGeom prst="rect">
+            <a:avLst/>
+          </a:prstGeom>
+          <a:noFill/>
+        </p:spPr>
+        <p:txBody>
+          <a:bodyPr wrap="square" lIns="36576" tIns="36576" rIns="36576" bIns="36576" anchor="ctr">
+            <a:spAutoFit/>
+          </a:bodyPr>
+          <a:lstStyle/>
+          <a:p>
+            <a:pPr algn="r"/>
+            <a:r>
+              <a:rPr sz="1200" b="1" i="0">
+                <a:solidFill>
+                  <a:srgbClr val="1F9D94"/>
+                </a:solidFill>
+                <a:latin typeface="Aptos"/>
+              </a:rPr>
+              <a:t>Proposed contribution split • Total = 100%</a:t>
+            </a:r>
+          </a:p>
+        </p:txBody>
+      </p:sp>
+      <p:sp>
+        <p:nvSpPr>
+          <p:cNvPr id="11" name="Rounded Rectangle 10"/>
+          <p:cNvSpPr/>
+          <p:nvPr/>
+        </p:nvSpPr>
+        <p:spPr>
+          <a:xfrm>
+            <a:off x="749808" y="2724912"/>
+            <a:ext cx="5193792" cy="393192"/>
+          </a:xfrm>
+          <a:prstGeom prst="roundRect">
+            <a:avLst>
+              <a:gd name="adj" fmla="val 12000"/>
+            </a:avLst>
+          </a:prstGeom>
+          <a:solidFill>
+            <a:srgbClr val="FFFFFF"/>
+          </a:solidFill>
+          <a:ln>
+            <a:solidFill>
+              <a:srgbClr val="D7E4F9"/>
+            </a:solidFill>
+          </a:ln>
+        </p:spPr>
+        <p:style>
+          <a:lnRef idx="1">
+            <a:schemeClr val="accent1"/>
+          </a:lnRef>
+          <a:fillRef idx="3">
+            <a:schemeClr val="accent1"/>
+          </a:fillRef>
+          <a:effectRef idx="2">
+            <a:schemeClr val="accent1"/>
+          </a:effectRef>
+          <a:fontRef idx="minor">
+            <a:schemeClr val="lt1"/>
+          </a:fontRef>
+        </p:style>
+        <p:txBody>
+          <a:bodyPr rtlCol="0" anchor="ctr"/>
+          <a:lstStyle/>
+          <a:p>
+            <a:pPr algn="ctr"/>
+            <a:endParaRPr/>
+          </a:p>
+        </p:txBody>
+      </p:sp>
+      <p:sp>
+        <p:nvSpPr>
+          <p:cNvPr id="12" name="TextBox 11"/>
+          <p:cNvSpPr txBox="1"/>
+          <p:nvPr/>
+        </p:nvSpPr>
+        <p:spPr>
+          <a:xfrm>
+            <a:off x="859536" y="2756916"/>
+            <a:ext cx="1115568" cy="301752"/>
+          </a:xfrm>
+          <a:prstGeom prst="rect">
+            <a:avLst/>
+          </a:prstGeom>
+          <a:noFill/>
+        </p:spPr>
+        <p:txBody>
+          <a:bodyPr wrap="square" lIns="36576" tIns="36576" rIns="36576" bIns="36576" anchor="ctr">
+            <a:spAutoFit/>
+          </a:bodyPr>
+          <a:lstStyle/>
+          <a:p>
+            <a:pPr algn="l"/>
+            <a:r>
+              <a:rPr sz="900" b="1" i="0">
+                <a:solidFill>
+                  <a:srgbClr val="2A62DC"/>
+                </a:solidFill>
+                <a:latin typeface="Aptos"/>
+              </a:rPr>
+              <a:t>2501AI04</a:t>
+            </a:r>
+          </a:p>
+        </p:txBody>
+      </p:sp>
+      <p:sp>
+        <p:nvSpPr>
+          <p:cNvPr id="13" name="TextBox 12"/>
+          <p:cNvSpPr txBox="1"/>
+          <p:nvPr/>
+        </p:nvSpPr>
+        <p:spPr>
+          <a:xfrm>
+            <a:off x="2029967" y="2756916"/>
+            <a:ext cx="2971800" cy="301752"/>
+          </a:xfrm>
+          <a:prstGeom prst="rect">
+            <a:avLst/>
+          </a:prstGeom>
+          <a:noFill/>
+        </p:spPr>
+        <p:txBody>
+          <a:bodyPr wrap="square" lIns="36576" tIns="36576" rIns="36576" bIns="36576" anchor="ctr">
+            <a:spAutoFit/>
+          </a:bodyPr>
+          <a:lstStyle/>
+          <a:p>
+            <a:pPr algn="l"/>
+            <a:r>
+              <a:rPr sz="1100" b="1" i="0">
+                <a:solidFill>
+                  <a:srgbClr val="132642"/>
+                </a:solidFill>
+                <a:latin typeface="Aptos"/>
+              </a:rPr>
+              <a:t>CH. Satyam</a:t>
+            </a:r>
+          </a:p>
+        </p:txBody>
+      </p:sp>
+      <p:sp>
+        <p:nvSpPr>
+          <p:cNvPr id="14" name="TextBox 13"/>
+          <p:cNvSpPr txBox="1"/>
+          <p:nvPr/>
+        </p:nvSpPr>
+        <p:spPr>
+          <a:xfrm>
+            <a:off x="5093208" y="2756916"/>
+            <a:ext cx="658368" cy="301752"/>
+          </a:xfrm>
+          <a:prstGeom prst="rect">
+            <a:avLst/>
+          </a:prstGeom>
+          <a:noFill/>
+        </p:spPr>
+        <p:txBody>
+          <a:bodyPr wrap="square" lIns="36576" tIns="36576" rIns="36576" bIns="36576" anchor="ctr">
+            <a:spAutoFit/>
+          </a:bodyPr>
+          <a:lstStyle/>
+          <a:p>
+            <a:pPr algn="r"/>
+            <a:r>
+              <a:rPr sz="1100" b="1" i="0">
+                <a:solidFill>
+                  <a:srgbClr val="1F9D94"/>
+                </a:solidFill>
+                <a:latin typeface="Aptos"/>
+              </a:rPr>
+              <a:t>12%</a:t>
+            </a:r>
+          </a:p>
+        </p:txBody>
+      </p:sp>
+      <p:sp>
+        <p:nvSpPr>
+          <p:cNvPr id="15" name="Rounded Rectangle 14"/>
+          <p:cNvSpPr/>
+          <p:nvPr/>
+        </p:nvSpPr>
+        <p:spPr>
+          <a:xfrm>
+            <a:off x="749808" y="3227832"/>
+            <a:ext cx="5193792" cy="393192"/>
+          </a:xfrm>
+          <a:prstGeom prst="roundRect">
+            <a:avLst>
+              <a:gd name="adj" fmla="val 12000"/>
+            </a:avLst>
+          </a:prstGeom>
+          <a:solidFill>
+            <a:srgbClr val="FFFFFF"/>
+          </a:solidFill>
+          <a:ln>
+            <a:solidFill>
+              <a:srgbClr val="D7E4F9"/>
+            </a:solidFill>
+          </a:ln>
+        </p:spPr>
+        <p:style>
+          <a:lnRef idx="1">
+            <a:schemeClr val="accent1"/>
+          </a:lnRef>
+          <a:fillRef idx="3">
+            <a:schemeClr val="accent1"/>
+          </a:fillRef>
+          <a:effectRef idx="2">
+            <a:schemeClr val="accent1"/>
+          </a:effectRef>
+          <a:fontRef idx="minor">
+            <a:schemeClr val="lt1"/>
+          </a:fontRef>
+        </p:style>
+        <p:txBody>
+          <a:bodyPr rtlCol="0" anchor="ctr"/>
+          <a:lstStyle/>
+          <a:p>
+            <a:pPr algn="ctr"/>
+            <a:endParaRPr/>
+          </a:p>
+        </p:txBody>
+      </p:sp>
+      <p:sp>
+        <p:nvSpPr>
+          <p:cNvPr id="16" name="TextBox 15"/>
+          <p:cNvSpPr txBox="1"/>
+          <p:nvPr/>
+        </p:nvSpPr>
+        <p:spPr>
+          <a:xfrm>
+            <a:off x="859536" y="3259836"/>
+            <a:ext cx="1115568" cy="301752"/>
+          </a:xfrm>
+          <a:prstGeom prst="rect">
+            <a:avLst/>
+          </a:prstGeom>
+          <a:noFill/>
+        </p:spPr>
+        <p:txBody>
+          <a:bodyPr wrap="square" lIns="36576" tIns="36576" rIns="36576" bIns="36576" anchor="ctr">
+            <a:spAutoFit/>
+          </a:bodyPr>
+          <a:lstStyle/>
+          <a:p>
+            <a:pPr algn="l"/>
+            <a:r>
+              <a:rPr sz="900" b="1" i="0">
+                <a:solidFill>
+                  <a:srgbClr val="2A62DC"/>
+                </a:solidFill>
+                <a:latin typeface="Aptos"/>
+              </a:rPr>
+              <a:t>2501AI43</a:t>
+            </a:r>
+          </a:p>
+        </p:txBody>
+      </p:sp>
+      <p:sp>
+        <p:nvSpPr>
+          <p:cNvPr id="17" name="TextBox 16"/>
+          <p:cNvSpPr txBox="1"/>
+          <p:nvPr/>
+        </p:nvSpPr>
+        <p:spPr>
+          <a:xfrm>
+            <a:off x="2029967" y="3259836"/>
+            <a:ext cx="2971800" cy="301752"/>
+          </a:xfrm>
+          <a:prstGeom prst="rect">
+            <a:avLst/>
+          </a:prstGeom>
+          <a:noFill/>
+        </p:spPr>
+        <p:txBody>
+          <a:bodyPr wrap="square" lIns="36576" tIns="36576" rIns="36576" bIns="36576" anchor="ctr">
+            <a:spAutoFit/>
+          </a:bodyPr>
+          <a:lstStyle/>
+          <a:p>
+            <a:pPr algn="l"/>
+            <a:r>
+              <a:rPr sz="1100" b="1" i="0">
+                <a:solidFill>
+                  <a:srgbClr val="132642"/>
+                </a:solidFill>
+                <a:latin typeface="Aptos"/>
+              </a:rPr>
+              <a:t>P. Uday Kumar</a:t>
+            </a:r>
+          </a:p>
+        </p:txBody>
+      </p:sp>
+      <p:sp>
+        <p:nvSpPr>
+          <p:cNvPr id="18" name="TextBox 17"/>
+          <p:cNvSpPr txBox="1"/>
+          <p:nvPr/>
+        </p:nvSpPr>
+        <p:spPr>
+          <a:xfrm>
+            <a:off x="5093208" y="3259836"/>
+            <a:ext cx="658368" cy="301752"/>
+          </a:xfrm>
+          <a:prstGeom prst="rect">
+            <a:avLst/>
+          </a:prstGeom>
+          <a:noFill/>
+        </p:spPr>
+        <p:txBody>
+          <a:bodyPr wrap="square" lIns="36576" tIns="36576" rIns="36576" bIns="36576" anchor="ctr">
+            <a:spAutoFit/>
+          </a:bodyPr>
+          <a:lstStyle/>
+          <a:p>
+            <a:pPr algn="r"/>
+            <a:r>
+              <a:rPr sz="1100" b="1" i="0">
+                <a:solidFill>
+                  <a:srgbClr val="1F9D94"/>
+                </a:solidFill>
+                <a:latin typeface="Aptos"/>
+              </a:rPr>
+              <a:t>12%</a:t>
+            </a:r>
+          </a:p>
+        </p:txBody>
+      </p:sp>
+      <p:sp>
+        <p:nvSpPr>
+          <p:cNvPr id="19" name="Rounded Rectangle 18"/>
+          <p:cNvSpPr/>
+          <p:nvPr/>
+        </p:nvSpPr>
+        <p:spPr>
+          <a:xfrm>
+            <a:off x="749808" y="3730752"/>
+            <a:ext cx="5193792" cy="393192"/>
+          </a:xfrm>
+          <a:prstGeom prst="roundRect">
+            <a:avLst>
+              <a:gd name="adj" fmla="val 12000"/>
+            </a:avLst>
+          </a:prstGeom>
+          <a:solidFill>
+            <a:srgbClr val="FFFFFF"/>
+          </a:solidFill>
+          <a:ln>
+            <a:solidFill>
+              <a:srgbClr val="D7E4F9"/>
+            </a:solidFill>
+          </a:ln>
+        </p:spPr>
+        <p:style>
+          <a:lnRef idx="1">
+            <a:schemeClr val="accent1"/>
+          </a:lnRef>
+          <a:fillRef idx="3">
+            <a:schemeClr val="accent1"/>
+          </a:fillRef>
+          <a:effectRef idx="2">
+            <a:schemeClr val="accent1"/>
+          </a:effectRef>
+          <a:fontRef idx="minor">
+            <a:schemeClr val="lt1"/>
+          </a:fontRef>
+        </p:style>
+        <p:txBody>
+          <a:bodyPr rtlCol="0" anchor="ctr"/>
+          <a:lstStyle/>
+          <a:p>
+            <a:pPr algn="ctr"/>
+            <a:endParaRPr/>
+          </a:p>
+        </p:txBody>
+      </p:sp>
+      <p:sp>
+        <p:nvSpPr>
+          <p:cNvPr id="20" name="TextBox 19"/>
+          <p:cNvSpPr txBox="1"/>
+          <p:nvPr/>
+        </p:nvSpPr>
+        <p:spPr>
+          <a:xfrm>
+            <a:off x="859536" y="3762756"/>
+            <a:ext cx="1115568" cy="301752"/>
+          </a:xfrm>
+          <a:prstGeom prst="rect">
+            <a:avLst/>
+          </a:prstGeom>
+          <a:noFill/>
+        </p:spPr>
+        <p:txBody>
+          <a:bodyPr wrap="square" lIns="36576" tIns="36576" rIns="36576" bIns="36576" anchor="ctr">
+            <a:spAutoFit/>
+          </a:bodyPr>
+          <a:lstStyle/>
+          <a:p>
+            <a:pPr algn="l"/>
+            <a:r>
+              <a:rPr sz="900" b="1" i="0">
+                <a:solidFill>
+                  <a:srgbClr val="2A62DC"/>
+                </a:solidFill>
+                <a:latin typeface="Aptos"/>
+              </a:rPr>
+              <a:t>2501AI09</a:t>
+            </a:r>
+          </a:p>
+        </p:txBody>
+      </p:sp>
+      <p:sp>
+        <p:nvSpPr>
+          <p:cNvPr id="21" name="TextBox 20"/>
+          <p:cNvSpPr txBox="1"/>
+          <p:nvPr/>
+        </p:nvSpPr>
+        <p:spPr>
+          <a:xfrm>
+            <a:off x="2029967" y="3762756"/>
+            <a:ext cx="2971800" cy="301752"/>
+          </a:xfrm>
+          <a:prstGeom prst="rect">
+            <a:avLst/>
+          </a:prstGeom>
+          <a:noFill/>
+        </p:spPr>
+        <p:txBody>
+          <a:bodyPr wrap="square" lIns="36576" tIns="36576" rIns="36576" bIns="36576" anchor="ctr">
+            <a:spAutoFit/>
+          </a:bodyPr>
+          <a:lstStyle/>
+          <a:p>
+            <a:pPr algn="l"/>
+            <a:r>
+              <a:rPr sz="1100" b="1" i="0">
+                <a:solidFill>
+                  <a:srgbClr val="132642"/>
+                </a:solidFill>
+                <a:latin typeface="Aptos"/>
+              </a:rPr>
+              <a:t>K. Surya Pratap Reddy</a:t>
+            </a:r>
+          </a:p>
+        </p:txBody>
+      </p:sp>
+      <p:sp>
+        <p:nvSpPr>
+          <p:cNvPr id="22" name="TextBox 21"/>
+          <p:cNvSpPr txBox="1"/>
+          <p:nvPr/>
+        </p:nvSpPr>
+        <p:spPr>
+          <a:xfrm>
+            <a:off x="5093208" y="3762756"/>
+            <a:ext cx="658368" cy="301752"/>
+          </a:xfrm>
+          <a:prstGeom prst="rect">
+            <a:avLst/>
+          </a:prstGeom>
+          <a:noFill/>
+        </p:spPr>
+        <p:txBody>
+          <a:bodyPr wrap="square" lIns="36576" tIns="36576" rIns="36576" bIns="36576" anchor="ctr">
+            <a:spAutoFit/>
+          </a:bodyPr>
+          <a:lstStyle/>
+          <a:p>
+            <a:pPr algn="r"/>
+            <a:r>
+              <a:rPr sz="1100" b="1" i="0">
+                <a:solidFill>
+                  <a:srgbClr val="1F9D94"/>
+                </a:solidFill>
+                <a:latin typeface="Aptos"/>
+              </a:rPr>
+              <a:t>12%</a:t>
+            </a:r>
+          </a:p>
+        </p:txBody>
+      </p:sp>
+      <p:sp>
+        <p:nvSpPr>
+          <p:cNvPr id="23" name="Rounded Rectangle 22"/>
+          <p:cNvSpPr/>
+          <p:nvPr/>
+        </p:nvSpPr>
+        <p:spPr>
+          <a:xfrm>
+            <a:off x="749808" y="4233672"/>
+            <a:ext cx="5193792" cy="393192"/>
+          </a:xfrm>
+          <a:prstGeom prst="roundRect">
+            <a:avLst>
+              <a:gd name="adj" fmla="val 12000"/>
+            </a:avLst>
+          </a:prstGeom>
+          <a:solidFill>
+            <a:srgbClr val="FFFFFF"/>
+          </a:solidFill>
+          <a:ln>
+            <a:solidFill>
+              <a:srgbClr val="D7E4F9"/>
+            </a:solidFill>
+          </a:ln>
+        </p:spPr>
+        <p:style>
+          <a:lnRef idx="1">
+            <a:schemeClr val="accent1"/>
+          </a:lnRef>
+          <a:fillRef idx="3">
+            <a:schemeClr val="accent1"/>
+          </a:fillRef>
+          <a:effectRef idx="2">
+            <a:schemeClr val="accent1"/>
+          </a:effectRef>
+          <a:fontRef idx="minor">
+            <a:schemeClr val="lt1"/>
+          </a:fontRef>
+        </p:style>
+        <p:txBody>
+          <a:bodyPr rtlCol="0" anchor="ctr"/>
+          <a:lstStyle/>
+          <a:p>
+            <a:pPr algn="ctr"/>
+            <a:endParaRPr/>
+          </a:p>
+        </p:txBody>
+      </p:sp>
+      <p:sp>
+        <p:nvSpPr>
+          <p:cNvPr id="24" name="TextBox 23"/>
+          <p:cNvSpPr txBox="1"/>
+          <p:nvPr/>
+        </p:nvSpPr>
+        <p:spPr>
+          <a:xfrm>
+            <a:off x="859536" y="4265676"/>
+            <a:ext cx="1115568" cy="301752"/>
+          </a:xfrm>
+          <a:prstGeom prst="rect">
+            <a:avLst/>
+          </a:prstGeom>
+          <a:noFill/>
+        </p:spPr>
+        <p:txBody>
+          <a:bodyPr wrap="square" lIns="36576" tIns="36576" rIns="36576" bIns="36576" anchor="ctr">
+            <a:spAutoFit/>
+          </a:bodyPr>
+          <a:lstStyle/>
+          <a:p>
+            <a:pPr algn="l"/>
+            <a:r>
+              <a:rPr sz="900" b="1" i="0">
+                <a:solidFill>
+                  <a:srgbClr val="2A62DC"/>
+                </a:solidFill>
+                <a:latin typeface="Aptos"/>
+              </a:rPr>
+              <a:t>2501AI17</a:t>
+            </a:r>
+          </a:p>
+        </p:txBody>
+      </p:sp>
+      <p:sp>
+        <p:nvSpPr>
+          <p:cNvPr id="25" name="TextBox 24"/>
+          <p:cNvSpPr txBox="1"/>
+          <p:nvPr/>
+        </p:nvSpPr>
+        <p:spPr>
+          <a:xfrm>
+            <a:off x="2029967" y="4265676"/>
+            <a:ext cx="2971800" cy="301752"/>
+          </a:xfrm>
+          <a:prstGeom prst="rect">
+            <a:avLst/>
+          </a:prstGeom>
+          <a:noFill/>
+        </p:spPr>
+        <p:txBody>
+          <a:bodyPr wrap="square" lIns="36576" tIns="36576" rIns="36576" bIns="36576" anchor="ctr">
+            <a:spAutoFit/>
+          </a:bodyPr>
+          <a:lstStyle/>
+          <a:p>
+            <a:pPr algn="l"/>
+            <a:r>
+              <a:rPr sz="1100" b="1" i="0">
+                <a:solidFill>
+                  <a:srgbClr val="132642"/>
+                </a:solidFill>
+                <a:latin typeface="Aptos"/>
+              </a:rPr>
+              <a:t>P. Balaji Ram</a:t>
+            </a:r>
+          </a:p>
+        </p:txBody>
+      </p:sp>
+      <p:sp>
+        <p:nvSpPr>
+          <p:cNvPr id="26" name="TextBox 25"/>
+          <p:cNvSpPr txBox="1"/>
+          <p:nvPr/>
+        </p:nvSpPr>
+        <p:spPr>
+          <a:xfrm>
+            <a:off x="5093208" y="4265676"/>
+            <a:ext cx="658368" cy="301752"/>
+          </a:xfrm>
+          <a:prstGeom prst="rect">
+            <a:avLst/>
+          </a:prstGeom>
+          <a:noFill/>
+        </p:spPr>
+        <p:txBody>
+          <a:bodyPr wrap="square" lIns="36576" tIns="36576" rIns="36576" bIns="36576" anchor="ctr">
+            <a:spAutoFit/>
+          </a:bodyPr>
+          <a:lstStyle/>
+          <a:p>
+            <a:pPr algn="r"/>
+            <a:r>
+              <a:rPr sz="1100" b="1" i="0">
+                <a:solidFill>
+                  <a:srgbClr val="1F9D94"/>
+                </a:solidFill>
+                <a:latin typeface="Aptos"/>
+              </a:rPr>
+              <a:t>12%</a:t>
+            </a:r>
+          </a:p>
+        </p:txBody>
+      </p:sp>
+      <p:sp>
+        <p:nvSpPr>
+          <p:cNvPr id="27" name="Rounded Rectangle 26"/>
+          <p:cNvSpPr/>
+          <p:nvPr/>
+        </p:nvSpPr>
+        <p:spPr>
+          <a:xfrm>
+            <a:off x="749808" y="4736592"/>
+            <a:ext cx="5193792" cy="393192"/>
+          </a:xfrm>
+          <a:prstGeom prst="roundRect">
+            <a:avLst>
+              <a:gd name="adj" fmla="val 12000"/>
+            </a:avLst>
+          </a:prstGeom>
+          <a:solidFill>
+            <a:srgbClr val="FFFFFF"/>
+          </a:solidFill>
+          <a:ln>
+            <a:solidFill>
+              <a:srgbClr val="D7E4F9"/>
+            </a:solidFill>
+          </a:ln>
+        </p:spPr>
+        <p:style>
+          <a:lnRef idx="1">
+            <a:schemeClr val="accent1"/>
+          </a:lnRef>
+          <a:fillRef idx="3">
+            <a:schemeClr val="accent1"/>
+          </a:fillRef>
+          <a:effectRef idx="2">
+            <a:schemeClr val="accent1"/>
+          </a:effectRef>
+          <a:fontRef idx="minor">
+            <a:schemeClr val="lt1"/>
+          </a:fontRef>
+        </p:style>
+        <p:txBody>
+          <a:bodyPr rtlCol="0" anchor="ctr"/>
+          <a:lstStyle/>
+          <a:p>
+            <a:pPr algn="ctr"/>
+            <a:endParaRPr/>
+          </a:p>
+        </p:txBody>
+      </p:sp>
+      <p:sp>
+        <p:nvSpPr>
+          <p:cNvPr id="28" name="TextBox 27"/>
+          <p:cNvSpPr txBox="1"/>
+          <p:nvPr/>
+        </p:nvSpPr>
+        <p:spPr>
+          <a:xfrm>
+            <a:off x="859536" y="4768596"/>
+            <a:ext cx="1115568" cy="301752"/>
+          </a:xfrm>
+          <a:prstGeom prst="rect">
+            <a:avLst/>
+          </a:prstGeom>
+          <a:noFill/>
+        </p:spPr>
+        <p:txBody>
+          <a:bodyPr wrap="square" lIns="36576" tIns="36576" rIns="36576" bIns="36576" anchor="ctr">
+            <a:spAutoFit/>
+          </a:bodyPr>
+          <a:lstStyle/>
+          <a:p>
+            <a:pPr algn="l"/>
+            <a:r>
+              <a:rPr sz="900" b="1" i="0">
+                <a:solidFill>
+                  <a:srgbClr val="2A62DC"/>
+                </a:solidFill>
+                <a:latin typeface="Aptos"/>
+              </a:rPr>
+              <a:t>2501AI19</a:t>
+            </a:r>
+          </a:p>
+        </p:txBody>
+      </p:sp>
+      <p:sp>
+        <p:nvSpPr>
+          <p:cNvPr id="29" name="TextBox 28"/>
+          <p:cNvSpPr txBox="1"/>
+          <p:nvPr/>
+        </p:nvSpPr>
+        <p:spPr>
+          <a:xfrm>
+            <a:off x="2029967" y="4768596"/>
+            <a:ext cx="2971800" cy="301752"/>
+          </a:xfrm>
+          <a:prstGeom prst="rect">
+            <a:avLst/>
+          </a:prstGeom>
+          <a:noFill/>
+        </p:spPr>
+        <p:txBody>
+          <a:bodyPr wrap="square" lIns="36576" tIns="36576" rIns="36576" bIns="36576" anchor="ctr">
+            <a:spAutoFit/>
+          </a:bodyPr>
+          <a:lstStyle/>
+          <a:p>
+            <a:pPr algn="l"/>
+            <a:r>
+              <a:rPr sz="1100" b="1" i="0">
+                <a:solidFill>
+                  <a:srgbClr val="132642"/>
+                </a:solidFill>
+                <a:latin typeface="Aptos"/>
+              </a:rPr>
+              <a:t>M. Nishanth</a:t>
+            </a:r>
+          </a:p>
+        </p:txBody>
+      </p:sp>
+      <p:sp>
+        <p:nvSpPr>
+          <p:cNvPr id="30" name="TextBox 29"/>
+          <p:cNvSpPr txBox="1"/>
+          <p:nvPr/>
+        </p:nvSpPr>
+        <p:spPr>
+          <a:xfrm>
+            <a:off x="5093208" y="4768596"/>
+            <a:ext cx="658368" cy="301752"/>
+          </a:xfrm>
+          <a:prstGeom prst="rect">
+            <a:avLst/>
+          </a:prstGeom>
+          <a:noFill/>
+        </p:spPr>
+        <p:txBody>
+          <a:bodyPr wrap="square" lIns="36576" tIns="36576" rIns="36576" bIns="36576" anchor="ctr">
+            <a:spAutoFit/>
+          </a:bodyPr>
+          <a:lstStyle/>
+          <a:p>
+            <a:pPr algn="r"/>
+            <a:r>
+              <a:rPr sz="1100" b="1" i="0">
+                <a:solidFill>
+                  <a:srgbClr val="1F9D94"/>
+                </a:solidFill>
+                <a:latin typeface="Aptos"/>
+              </a:rPr>
+              <a:t>12%</a:t>
+            </a:r>
+          </a:p>
+        </p:txBody>
+      </p:sp>
+      <p:sp>
+        <p:nvSpPr>
+          <p:cNvPr id="31" name="Rounded Rectangle 30"/>
+          <p:cNvSpPr/>
+          <p:nvPr/>
+        </p:nvSpPr>
+        <p:spPr>
+          <a:xfrm>
+            <a:off x="6309360" y="2724912"/>
+            <a:ext cx="5193792" cy="393192"/>
+          </a:xfrm>
+          <a:prstGeom prst="roundRect">
+            <a:avLst>
+              <a:gd name="adj" fmla="val 12000"/>
+            </a:avLst>
+          </a:prstGeom>
+          <a:solidFill>
+            <a:srgbClr val="FFFFFF"/>
+          </a:solidFill>
+          <a:ln>
+            <a:solidFill>
+              <a:srgbClr val="D7E4F9"/>
+            </a:solidFill>
+          </a:ln>
+        </p:spPr>
+        <p:style>
+          <a:lnRef idx="1">
+            <a:schemeClr val="accent1"/>
+          </a:lnRef>
+          <a:fillRef idx="3">
+            <a:schemeClr val="accent1"/>
+          </a:fillRef>
+          <a:effectRef idx="2">
+            <a:schemeClr val="accent1"/>
+          </a:effectRef>
+          <a:fontRef idx="minor">
+            <a:schemeClr val="lt1"/>
+          </a:fontRef>
+        </p:style>
+        <p:txBody>
+          <a:bodyPr rtlCol="0" anchor="ctr"/>
+          <a:lstStyle/>
+          <a:p>
+            <a:pPr algn="ctr"/>
+            <a:endParaRPr/>
+          </a:p>
+        </p:txBody>
+      </p:sp>
+      <p:sp>
+        <p:nvSpPr>
+          <p:cNvPr id="32" name="TextBox 31"/>
+          <p:cNvSpPr txBox="1"/>
+          <p:nvPr/>
+        </p:nvSpPr>
+        <p:spPr>
+          <a:xfrm>
+            <a:off x="6419088" y="2756916"/>
+            <a:ext cx="1115568" cy="301752"/>
+          </a:xfrm>
+          <a:prstGeom prst="rect">
+            <a:avLst/>
+          </a:prstGeom>
+          <a:noFill/>
+        </p:spPr>
+        <p:txBody>
+          <a:bodyPr wrap="square" lIns="36576" tIns="36576" rIns="36576" bIns="36576" anchor="ctr">
+            <a:spAutoFit/>
+          </a:bodyPr>
+          <a:lstStyle/>
+          <a:p>
+            <a:pPr algn="l"/>
+            <a:r>
+              <a:rPr sz="900" b="1" i="0">
+                <a:solidFill>
+                  <a:srgbClr val="2A62DC"/>
+                </a:solidFill>
+                <a:latin typeface="Aptos"/>
+              </a:rPr>
+              <a:t>2501AI08</a:t>
+            </a:r>
+          </a:p>
+        </p:txBody>
+      </p:sp>
+      <p:sp>
+        <p:nvSpPr>
+          <p:cNvPr id="33" name="TextBox 32"/>
+          <p:cNvSpPr txBox="1"/>
+          <p:nvPr/>
+        </p:nvSpPr>
+        <p:spPr>
+          <a:xfrm>
+            <a:off x="7589520" y="2756916"/>
+            <a:ext cx="2971800" cy="301752"/>
+          </a:xfrm>
+          <a:prstGeom prst="rect">
+            <a:avLst/>
+          </a:prstGeom>
+          <a:noFill/>
+        </p:spPr>
+        <p:txBody>
+          <a:bodyPr wrap="square" lIns="36576" tIns="36576" rIns="36576" bIns="36576" anchor="ctr">
+            <a:spAutoFit/>
+          </a:bodyPr>
+          <a:lstStyle/>
+          <a:p>
+            <a:pPr algn="l"/>
+            <a:r>
+              <a:rPr sz="1100" b="1" i="0">
+                <a:solidFill>
+                  <a:srgbClr val="132642"/>
+                </a:solidFill>
+                <a:latin typeface="Aptos"/>
+              </a:rPr>
+              <a:t>N. Vignesh</a:t>
+            </a:r>
+          </a:p>
+        </p:txBody>
+      </p:sp>
+      <p:sp>
+        <p:nvSpPr>
+          <p:cNvPr id="34" name="TextBox 33"/>
+          <p:cNvSpPr txBox="1"/>
+          <p:nvPr/>
+        </p:nvSpPr>
+        <p:spPr>
+          <a:xfrm>
+            <a:off x="10652760" y="2756916"/>
+            <a:ext cx="658368" cy="301752"/>
+          </a:xfrm>
+          <a:prstGeom prst="rect">
+            <a:avLst/>
+          </a:prstGeom>
+          <a:noFill/>
+        </p:spPr>
+        <p:txBody>
+          <a:bodyPr wrap="square" lIns="36576" tIns="36576" rIns="36576" bIns="36576" anchor="ctr">
+            <a:spAutoFit/>
+          </a:bodyPr>
+          <a:lstStyle/>
+          <a:p>
+            <a:pPr algn="r"/>
+            <a:r>
+              <a:rPr sz="1100" b="1" i="0">
+                <a:solidFill>
+                  <a:srgbClr val="1F9D94"/>
+                </a:solidFill>
+                <a:latin typeface="Aptos"/>
+              </a:rPr>
+              <a:t>10%</a:t>
+            </a:r>
+          </a:p>
+        </p:txBody>
+      </p:sp>
+      <p:sp>
+        <p:nvSpPr>
+          <p:cNvPr id="35" name="Rounded Rectangle 34"/>
+          <p:cNvSpPr/>
+          <p:nvPr/>
+        </p:nvSpPr>
+        <p:spPr>
+          <a:xfrm>
+            <a:off x="6309360" y="3227832"/>
+            <a:ext cx="5193792" cy="393192"/>
+          </a:xfrm>
+          <a:prstGeom prst="roundRect">
+            <a:avLst>
+              <a:gd name="adj" fmla="val 12000"/>
+            </a:avLst>
+          </a:prstGeom>
+          <a:solidFill>
+            <a:srgbClr val="FFFFFF"/>
+          </a:solidFill>
+          <a:ln>
+            <a:solidFill>
+              <a:srgbClr val="D7E4F9"/>
+            </a:solidFill>
+          </a:ln>
+        </p:spPr>
+        <p:style>
+          <a:lnRef idx="1">
+            <a:schemeClr val="accent1"/>
+          </a:lnRef>
+          <a:fillRef idx="3">
+            <a:schemeClr val="accent1"/>
+          </a:fillRef>
+          <a:effectRef idx="2">
+            <a:schemeClr val="accent1"/>
+          </a:effectRef>
+          <a:fontRef idx="minor">
+            <a:schemeClr val="lt1"/>
+          </a:fontRef>
+        </p:style>
+        <p:txBody>
+          <a:bodyPr rtlCol="0" anchor="ctr"/>
+          <a:lstStyle/>
+          <a:p>
+            <a:pPr algn="ctr"/>
+            <a:endParaRPr/>
+          </a:p>
+        </p:txBody>
+      </p:sp>
+      <p:sp>
+        <p:nvSpPr>
+          <p:cNvPr id="36" name="TextBox 35"/>
+          <p:cNvSpPr txBox="1"/>
+          <p:nvPr/>
+        </p:nvSpPr>
+        <p:spPr>
+          <a:xfrm>
+            <a:off x="6419088" y="3259836"/>
+            <a:ext cx="1115568" cy="301752"/>
+          </a:xfrm>
+          <a:prstGeom prst="rect">
+            <a:avLst/>
+          </a:prstGeom>
+          <a:noFill/>
+        </p:spPr>
+        <p:txBody>
+          <a:bodyPr wrap="square" lIns="36576" tIns="36576" rIns="36576" bIns="36576" anchor="ctr">
+            <a:spAutoFit/>
+          </a:bodyPr>
+          <a:lstStyle/>
+          <a:p>
+            <a:pPr algn="l"/>
+            <a:r>
+              <a:rPr sz="900" b="1" i="0">
+                <a:solidFill>
+                  <a:srgbClr val="2A62DC"/>
+                </a:solidFill>
+                <a:latin typeface="Aptos"/>
+              </a:rPr>
+              <a:t>2501CS06</a:t>
+            </a:r>
+          </a:p>
+        </p:txBody>
+      </p:sp>
+      <p:sp>
+        <p:nvSpPr>
+          <p:cNvPr id="37" name="TextBox 36"/>
+          <p:cNvSpPr txBox="1"/>
+          <p:nvPr/>
+        </p:nvSpPr>
+        <p:spPr>
+          <a:xfrm>
+            <a:off x="7589520" y="3259836"/>
+            <a:ext cx="2971800" cy="301752"/>
+          </a:xfrm>
+          <a:prstGeom prst="rect">
+            <a:avLst/>
+          </a:prstGeom>
+          <a:noFill/>
+        </p:spPr>
+        <p:txBody>
+          <a:bodyPr wrap="square" lIns="36576" tIns="36576" rIns="36576" bIns="36576" anchor="ctr">
+            <a:spAutoFit/>
+          </a:bodyPr>
+          <a:lstStyle/>
+          <a:p>
+            <a:pPr algn="l"/>
+            <a:r>
+              <a:rPr sz="1100" b="1" i="0">
+                <a:solidFill>
+                  <a:srgbClr val="132642"/>
+                </a:solidFill>
+                <a:latin typeface="Aptos"/>
+              </a:rPr>
+              <a:t>T. Jayanth Naga Sai</a:t>
+            </a:r>
+          </a:p>
+        </p:txBody>
+      </p:sp>
+      <p:sp>
+        <p:nvSpPr>
+          <p:cNvPr id="38" name="TextBox 37"/>
+          <p:cNvSpPr txBox="1"/>
+          <p:nvPr/>
+        </p:nvSpPr>
+        <p:spPr>
+          <a:xfrm>
+            <a:off x="10652760" y="3259836"/>
+            <a:ext cx="658368" cy="301752"/>
+          </a:xfrm>
+          <a:prstGeom prst="rect">
+            <a:avLst/>
+          </a:prstGeom>
+          <a:noFill/>
+        </p:spPr>
+        <p:txBody>
+          <a:bodyPr wrap="square" lIns="36576" tIns="36576" rIns="36576" bIns="36576" anchor="ctr">
+            <a:spAutoFit/>
+          </a:bodyPr>
+          <a:lstStyle/>
+          <a:p>
+            <a:pPr algn="r"/>
+            <a:r>
+              <a:rPr sz="1100" b="1" i="0">
+                <a:solidFill>
+                  <a:srgbClr val="1F9D94"/>
+                </a:solidFill>
+                <a:latin typeface="Aptos"/>
+              </a:rPr>
+              <a:t>10%</a:t>
+            </a:r>
+          </a:p>
+        </p:txBody>
+      </p:sp>
+      <p:sp>
+        <p:nvSpPr>
+          <p:cNvPr id="39" name="Rounded Rectangle 38"/>
+          <p:cNvSpPr/>
+          <p:nvPr/>
+        </p:nvSpPr>
+        <p:spPr>
+          <a:xfrm>
+            <a:off x="6309360" y="3730752"/>
+            <a:ext cx="5193792" cy="393192"/>
+          </a:xfrm>
+          <a:prstGeom prst="roundRect">
+            <a:avLst>
+              <a:gd name="adj" fmla="val 12000"/>
+            </a:avLst>
+          </a:prstGeom>
+          <a:solidFill>
+            <a:srgbClr val="FFFFFF"/>
+          </a:solidFill>
+          <a:ln>
+            <a:solidFill>
+              <a:srgbClr val="D7E4F9"/>
+            </a:solidFill>
+          </a:ln>
+        </p:spPr>
+        <p:style>
+          <a:lnRef idx="1">
+            <a:schemeClr val="accent1"/>
+          </a:lnRef>
+          <a:fillRef idx="3">
+            <a:schemeClr val="accent1"/>
+          </a:fillRef>
+          <a:effectRef idx="2">
+            <a:schemeClr val="accent1"/>
+          </a:effectRef>
+          <a:fontRef idx="minor">
+            <a:schemeClr val="lt1"/>
+          </a:fontRef>
+        </p:style>
+        <p:txBody>
+          <a:bodyPr rtlCol="0" anchor="ctr"/>
+          <a:lstStyle/>
+          <a:p>
+            <a:pPr algn="ctr"/>
+            <a:endParaRPr/>
+          </a:p>
+        </p:txBody>
+      </p:sp>
+      <p:sp>
+        <p:nvSpPr>
+          <p:cNvPr id="40" name="TextBox 39"/>
+          <p:cNvSpPr txBox="1"/>
+          <p:nvPr/>
+        </p:nvSpPr>
+        <p:spPr>
+          <a:xfrm>
+            <a:off x="6419088" y="3762756"/>
+            <a:ext cx="1115568" cy="301752"/>
+          </a:xfrm>
+          <a:prstGeom prst="rect">
+            <a:avLst/>
+          </a:prstGeom>
+          <a:noFill/>
+        </p:spPr>
+        <p:txBody>
+          <a:bodyPr wrap="square" lIns="36576" tIns="36576" rIns="36576" bIns="36576" anchor="ctr">
+            <a:spAutoFit/>
+          </a:bodyPr>
+          <a:lstStyle/>
+          <a:p>
+            <a:pPr algn="l"/>
+            <a:r>
+              <a:rPr sz="900" b="1" i="0">
+                <a:solidFill>
+                  <a:srgbClr val="2A62DC"/>
+                </a:solidFill>
+                <a:latin typeface="Aptos"/>
+              </a:rPr>
+              <a:t>2501CS45</a:t>
+            </a:r>
+          </a:p>
+        </p:txBody>
+      </p:sp>
+      <p:sp>
+        <p:nvSpPr>
+          <p:cNvPr id="41" name="TextBox 40"/>
+          <p:cNvSpPr txBox="1"/>
+          <p:nvPr/>
+        </p:nvSpPr>
+        <p:spPr>
+          <a:xfrm>
+            <a:off x="7589520" y="3762756"/>
+            <a:ext cx="2971800" cy="301752"/>
+          </a:xfrm>
+          <a:prstGeom prst="rect">
+            <a:avLst/>
+          </a:prstGeom>
+          <a:noFill/>
+        </p:spPr>
+        <p:txBody>
+          <a:bodyPr wrap="square" lIns="36576" tIns="36576" rIns="36576" bIns="36576" anchor="ctr">
+            <a:spAutoFit/>
+          </a:bodyPr>
+          <a:lstStyle/>
+          <a:p>
+            <a:pPr algn="l"/>
+            <a:r>
+              <a:rPr sz="1100" b="1" i="0">
+                <a:solidFill>
+                  <a:srgbClr val="132642"/>
+                </a:solidFill>
+                <a:latin typeface="Aptos"/>
+              </a:rPr>
+              <a:t>G. Arun</a:t>
+            </a:r>
+          </a:p>
+        </p:txBody>
+      </p:sp>
+      <p:sp>
+        <p:nvSpPr>
+          <p:cNvPr id="42" name="TextBox 41"/>
+          <p:cNvSpPr txBox="1"/>
+          <p:nvPr/>
+        </p:nvSpPr>
+        <p:spPr>
+          <a:xfrm>
+            <a:off x="10652760" y="3762756"/>
+            <a:ext cx="658368" cy="301752"/>
+          </a:xfrm>
+          <a:prstGeom prst="rect">
+            <a:avLst/>
+          </a:prstGeom>
+          <a:noFill/>
+        </p:spPr>
+        <p:txBody>
+          <a:bodyPr wrap="square" lIns="36576" tIns="36576" rIns="36576" bIns="36576" anchor="ctr">
+            <a:spAutoFit/>
+          </a:bodyPr>
+          <a:lstStyle/>
+          <a:p>
+            <a:pPr algn="r"/>
+            <a:r>
+              <a:rPr sz="1100" b="1" i="0">
+                <a:solidFill>
+                  <a:srgbClr val="1F9D94"/>
+                </a:solidFill>
+                <a:latin typeface="Aptos"/>
+              </a:rPr>
+              <a:t>10%</a:t>
+            </a:r>
+          </a:p>
+        </p:txBody>
+      </p:sp>
+      <p:sp>
+        <p:nvSpPr>
+          <p:cNvPr id="43" name="Rounded Rectangle 42"/>
+          <p:cNvSpPr/>
+          <p:nvPr/>
+        </p:nvSpPr>
+        <p:spPr>
+          <a:xfrm>
+            <a:off x="6309360" y="4233672"/>
+            <a:ext cx="5193792" cy="393192"/>
+          </a:xfrm>
+          <a:prstGeom prst="roundRect">
+            <a:avLst>
+              <a:gd name="adj" fmla="val 12000"/>
+            </a:avLst>
+          </a:prstGeom>
+          <a:solidFill>
+            <a:srgbClr val="FFFFFF"/>
+          </a:solidFill>
+          <a:ln>
+            <a:solidFill>
+              <a:srgbClr val="D7E4F9"/>
+            </a:solidFill>
+          </a:ln>
+        </p:spPr>
+        <p:style>
+          <a:lnRef idx="1">
+            <a:schemeClr val="accent1"/>
+          </a:lnRef>
+          <a:fillRef idx="3">
+            <a:schemeClr val="accent1"/>
+          </a:fillRef>
+          <a:effectRef idx="2">
+            <a:schemeClr val="accent1"/>
+          </a:effectRef>
+          <a:fontRef idx="minor">
+            <a:schemeClr val="lt1"/>
+          </a:fontRef>
+        </p:style>
+        <p:txBody>
+          <a:bodyPr rtlCol="0" anchor="ctr"/>
+          <a:lstStyle/>
+          <a:p>
+            <a:pPr algn="ctr"/>
+            <a:endParaRPr/>
+          </a:p>
+        </p:txBody>
+      </p:sp>
+      <p:sp>
+        <p:nvSpPr>
+          <p:cNvPr id="44" name="TextBox 43"/>
+          <p:cNvSpPr txBox="1"/>
+          <p:nvPr/>
+        </p:nvSpPr>
+        <p:spPr>
+          <a:xfrm>
+            <a:off x="6419088" y="4265676"/>
+            <a:ext cx="1115568" cy="301752"/>
+          </a:xfrm>
+          <a:prstGeom prst="rect">
+            <a:avLst/>
+          </a:prstGeom>
+          <a:noFill/>
+        </p:spPr>
+        <p:txBody>
+          <a:bodyPr wrap="square" lIns="36576" tIns="36576" rIns="36576" bIns="36576" anchor="ctr">
+            <a:spAutoFit/>
+          </a:bodyPr>
+          <a:lstStyle/>
+          <a:p>
+            <a:pPr algn="l"/>
+            <a:r>
+              <a:rPr sz="900" b="1" i="0">
+                <a:solidFill>
+                  <a:srgbClr val="2A62DC"/>
+                </a:solidFill>
+                <a:latin typeface="Aptos"/>
+              </a:rPr>
+              <a:t>2501AI42</a:t>
+            </a:r>
+          </a:p>
+        </p:txBody>
+      </p:sp>
+      <p:sp>
+        <p:nvSpPr>
+          <p:cNvPr id="45" name="TextBox 44"/>
+          <p:cNvSpPr txBox="1"/>
+          <p:nvPr/>
+        </p:nvSpPr>
+        <p:spPr>
+          <a:xfrm>
+            <a:off x="7589520" y="4265676"/>
+            <a:ext cx="2971800" cy="301752"/>
+          </a:xfrm>
+          <a:prstGeom prst="rect">
+            <a:avLst/>
+          </a:prstGeom>
+          <a:noFill/>
+        </p:spPr>
+        <p:txBody>
+          <a:bodyPr wrap="square" lIns="36576" tIns="36576" rIns="36576" bIns="36576" anchor="ctr">
+            <a:spAutoFit/>
+          </a:bodyPr>
+          <a:lstStyle/>
+          <a:p>
+            <a:pPr algn="l"/>
+            <a:r>
+              <a:rPr sz="1100" b="1" i="0">
+                <a:solidFill>
+                  <a:srgbClr val="132642"/>
+                </a:solidFill>
+                <a:latin typeface="Aptos"/>
+              </a:rPr>
+              <a:t>B. Abhinandhan Goud</a:t>
+            </a:r>
+          </a:p>
+        </p:txBody>
+      </p:sp>
+      <p:sp>
+        <p:nvSpPr>
+          <p:cNvPr id="46" name="TextBox 45"/>
+          <p:cNvSpPr txBox="1"/>
+          <p:nvPr/>
+        </p:nvSpPr>
+        <p:spPr>
+          <a:xfrm>
+            <a:off x="10652760" y="4265676"/>
+            <a:ext cx="658368" cy="301752"/>
+          </a:xfrm>
+          <a:prstGeom prst="rect">
+            <a:avLst/>
+          </a:prstGeom>
+          <a:noFill/>
+        </p:spPr>
+        <p:txBody>
+          <a:bodyPr wrap="square" lIns="36576" tIns="36576" rIns="36576" bIns="36576" anchor="ctr">
+            <a:spAutoFit/>
+          </a:bodyPr>
+          <a:lstStyle/>
+          <a:p>
+            <a:pPr algn="r"/>
+            <a:r>
+              <a:rPr sz="1100" b="1" i="0">
+                <a:solidFill>
+                  <a:srgbClr val="1F9D94"/>
+                </a:solidFill>
+                <a:latin typeface="Aptos"/>
+              </a:rPr>
+              <a:t>10%</a:t>
+            </a:r>
+          </a:p>
+        </p:txBody>
+      </p:sp>
+      <p:sp>
+        <p:nvSpPr>
+          <p:cNvPr id="47" name="Rounded Rectangle 46"/>
+          <p:cNvSpPr/>
+          <p:nvPr/>
+        </p:nvSpPr>
+        <p:spPr>
+          <a:xfrm>
+            <a:off x="749808" y="5422392"/>
+            <a:ext cx="10652760" cy="502920"/>
+          </a:xfrm>
+          <a:prstGeom prst="roundRect">
+            <a:avLst>
+              <a:gd name="adj" fmla="val 12000"/>
+            </a:avLst>
+          </a:prstGeom>
+          <a:solidFill>
+            <a:srgbClr val="132642"/>
+          </a:solidFill>
+          <a:ln>
+            <a:noFill/>
+          </a:ln>
+        </p:spPr>
+        <p:style>
+          <a:lnRef idx="1">
+            <a:schemeClr val="accent1"/>
+          </a:lnRef>
+          <a:fillRef idx="3">
+            <a:schemeClr val="accent1"/>
+          </a:fillRef>
+          <a:effectRef idx="2">
+            <a:schemeClr val="accent1"/>
+          </a:effectRef>
+          <a:fontRef idx="minor">
+            <a:schemeClr val="lt1"/>
+          </a:fontRef>
+        </p:style>
+        <p:txBody>
+          <a:bodyPr rtlCol="0" anchor="ctr"/>
+          <a:lstStyle/>
+          <a:p>
+            <a:pPr algn="ctr"/>
+            <a:endParaRPr/>
+          </a:p>
+        </p:txBody>
+      </p:sp>
+      <p:sp>
+        <p:nvSpPr>
+          <p:cNvPr id="48" name="TextBox 47"/>
+          <p:cNvSpPr txBox="1"/>
+          <p:nvPr/>
+        </p:nvSpPr>
+        <p:spPr>
+          <a:xfrm>
+            <a:off x="914400" y="5495544"/>
+            <a:ext cx="10332720" cy="329184"/>
+          </a:xfrm>
+          <a:prstGeom prst="rect">
+            <a:avLst/>
+          </a:prstGeom>
+          <a:noFill/>
+        </p:spPr>
+        <p:txBody>
+          <a:bodyPr wrap="square" lIns="36576" tIns="36576" rIns="36576" bIns="36576" anchor="ctr">
+            <a:spAutoFit/>
+          </a:bodyPr>
+          <a:lstStyle/>
+          <a:p>
+            <a:pPr algn="ctr"/>
+            <a:r>
+              <a:rPr sz="1400" b="1" i="0">
+                <a:solidFill>
+                  <a:srgbClr val="FFFFFF"/>
+                </a:solidFill>
+                <a:latin typeface="Aptos"/>
+              </a:rPr>
+              <a:t>Efficient allocation. Fairer priorities. Better-informed relief planning.</a:t>
+            </a:r>
+          </a:p>
+        </p:txBody>
+      </p:sp>
+      <p:sp>
+        <p:nvSpPr>
+          <p:cNvPr id="49" name="TextBox 48"/>
+          <p:cNvSpPr txBox="1"/>
+          <p:nvPr/>
+        </p:nvSpPr>
+        <p:spPr>
+          <a:xfrm>
+            <a:off x="749808" y="6053328"/>
+            <a:ext cx="10881360" cy="256032"/>
+          </a:xfrm>
+          <a:prstGeom prst="rect">
+            <a:avLst/>
+          </a:prstGeom>
+          <a:noFill/>
+        </p:spPr>
+        <p:txBody>
+          <a:bodyPr wrap="square" lIns="36576" tIns="36576" rIns="36576" bIns="36576" anchor="ctr">
+            <a:spAutoFit/>
+          </a:bodyPr>
+          <a:lstStyle/>
+          <a:p>
+            <a:pPr algn="ctr"/>
+            <a:r>
+              <a:rPr sz="800" b="0" i="0">
+                <a:solidFill>
+                  <a:srgbClr val="53657C"/>
+                </a:solidFill>
+                <a:latin typeface="Aptos"/>
+              </a:rPr>
+              <a:t>Live demo: disaster-relief-optimizer-m8hg.onrender.com  •  Source code: github.com/chintalapudisatyam/disaster_relief_optimizer</a:t>
+            </a:r>
+          </a:p>
+        </p:txBody>
+      </p:sp>
+      <p:sp>
+        <p:nvSpPr>
+          <p:cNvPr id="50" name="TextBox 49"/>
+          <p:cNvSpPr txBox="1"/>
+          <p:nvPr/>
+        </p:nvSpPr>
+        <p:spPr>
+          <a:xfrm>
+            <a:off x="749808" y="6318504"/>
+            <a:ext cx="10881360" cy="201168"/>
+          </a:xfrm>
+          <a:prstGeom prst="rect">
+            <a:avLst/>
+          </a:prstGeom>
+          <a:noFill/>
+        </p:spPr>
+        <p:txBody>
+          <a:bodyPr wrap="square" lIns="36576" tIns="36576" rIns="36576" bIns="36576" anchor="ctr">
+            <a:spAutoFit/>
+          </a:bodyPr>
+          <a:lstStyle/>
+          <a:p>
+            <a:pPr algn="ctr"/>
+            <a:r>
+              <a:rPr sz="900" b="0" i="1">
+                <a:solidFill>
+                  <a:srgbClr val="53657C"/>
+                </a:solidFill>
+                <a:latin typeface="Aptos"/>
+              </a:rPr>
+              <a:t>Percentages are a proposed split; adjust them to reflect actual contributions.</a:t>
+            </a:r>
+          </a:p>
+        </p:txBody>
+      </p:sp>
+      <p:sp>
+        <p:nvSpPr>
+          <p:cNvPr id="51" name="TextBox 50"/>
+          <p:cNvSpPr txBox="1"/>
+          <p:nvPr/>
+        </p:nvSpPr>
+        <p:spPr>
+          <a:xfrm>
+            <a:off x="11411712" y="6510528"/>
+            <a:ext cx="256032" cy="164592"/>
+          </a:xfrm>
+          <a:prstGeom prst="rect">
+            <a:avLst/>
+          </a:prstGeom>
+          <a:noFill/>
+        </p:spPr>
+        <p:txBody>
+          <a:bodyPr wrap="square" lIns="36576" tIns="36576" rIns="36576" bIns="36576" anchor="ctr">
+            <a:spAutoFit/>
+          </a:bodyPr>
+          <a:lstStyle/>
+          <a:p>
+            <a:pPr algn="r"/>
+            <a:r>
+              <a:rPr sz="900" b="0" i="0">
+                <a:solidFill>
+                  <a:srgbClr val="53657C"/>
+                </a:solidFill>
+                <a:latin typeface="Aptos"/>
+              </a:rPr>
+              <a:t>10</a:t>
+            </a:r>
+          </a:p>
+        </p:txBody>
+      </p:sp>
+    </p:spTree>
+  </p:cSld>
+  <p:clrMapOvr>
+    <a:masterClrMapping/>
+  </p:clrMapOvr>
+</p:sld>
+</file>
+
 <file path=ppt/slides/slide2.xml><?xml version="1.0" encoding="utf-8"?>
 <p:sld xmlns:a="http://schemas.openxmlformats.org/drawingml/2006/main" xmlns:r="http://schemas.openxmlformats.org/officeDocument/2006/relationships" xmlns:p="http://schemas.openxmlformats.org/presentationml/2006/main">
   <p:cSld>
@@ -4622,15 +6563,15 @@
             </a:pPr>
             <a:r>
               <a:rPr sz="2000" dirty="0"/>
-              <a:t>Without a structured plan, resources may be allocated </a:t>
-            </a:r>
-            <a:r>
-              <a:rPr sz="2000" dirty="0" err="1"/>
-              <a:t>ineffciently</a:t>
+              <a:t>Without a structured plan, resources may be allocated ineff</a:t>
+            </a:r>
+            <a:r>
+              <a:rPr lang="en-US" sz="2000" dirty="0"/>
+              <a:t>i</a:t>
             </a:r>
             <a:r>
               <a:rPr sz="2000" dirty="0"/>
-              <a:t> and critical needs may remain unmet.</a:t>
+              <a:t>ciently and critical needs may remain unmet.</a:t>
             </a:r>
           </a:p>
         </p:txBody>
@@ -12734,7 +14675,7 @@
     <p:bg>
       <p:bgPr>
         <a:solidFill>
-          <a:srgbClr val="122340"/>
+          <a:srgbClr val="132642"/>
         </a:solidFill>
         <a:effectLst/>
       </p:bgPr>
@@ -12755,186 +14696,23 @@
       </p:grpSpPr>
       <p:sp>
         <p:nvSpPr>
-          <p:cNvPr id="2" name="TextBox 1"/>
-          <p:cNvSpPr txBox="1"/>
-          <p:nvPr/>
-        </p:nvSpPr>
-        <p:spPr>
-          <a:xfrm>
-            <a:off x="822960" y="685800"/>
-            <a:ext cx="10515600" cy="411480"/>
-          </a:xfrm>
-          <a:prstGeom prst="rect">
-            <a:avLst/>
-          </a:prstGeom>
-          <a:noFill/>
-        </p:spPr>
-        <p:txBody>
-          <a:bodyPr wrap="none" lIns="45720" rIns="45720" anchor="t">
-            <a:spAutoFit/>
-          </a:bodyPr>
-          <a:lstStyle/>
-          <a:p>
-            <a:pPr>
-              <a:spcAft>
-                <a:spcPts val="700"/>
-              </a:spcAft>
-              <a:defRPr sz="1300" b="1">
-                <a:solidFill>
-                  <a:srgbClr val="89C4FF"/>
-                </a:solidFill>
-                <a:latin typeface="Aptos"/>
-              </a:defRPr>
-            </a:pPr>
-            <a:r>
-              <a:t>LIVE DEMONSTRATION</a:t>
-            </a:r>
-          </a:p>
-        </p:txBody>
-      </p:sp>
-      <p:sp>
-        <p:nvSpPr>
-          <p:cNvPr id="3" name="TextBox 2"/>
-          <p:cNvSpPr txBox="1"/>
-          <p:nvPr/>
-        </p:nvSpPr>
-        <p:spPr>
-          <a:xfrm>
-            <a:off x="822960" y="1325880"/>
-            <a:ext cx="10515600" cy="822960"/>
-          </a:xfrm>
-          <a:prstGeom prst="rect">
-            <a:avLst/>
-          </a:prstGeom>
-          <a:noFill/>
-        </p:spPr>
-        <p:txBody>
-          <a:bodyPr wrap="none" lIns="45720" rIns="45720" anchor="t">
-            <a:spAutoFit/>
-          </a:bodyPr>
-          <a:lstStyle/>
-          <a:p>
-            <a:pPr>
-              <a:spcAft>
-                <a:spcPts val="700"/>
-              </a:spcAft>
-              <a:defRPr sz="3000" b="1">
-                <a:solidFill>
-                  <a:srgbClr val="FFFFFF"/>
-                </a:solidFill>
-                <a:latin typeface="Aptos"/>
-              </a:defRPr>
-            </a:pPr>
-            <a:r>
-              <a:t>Open the project website</a:t>
-            </a:r>
-          </a:p>
-        </p:txBody>
-      </p:sp>
-      <p:sp>
-        <p:nvSpPr>
-          <p:cNvPr id="4" name="TextBox 3"/>
-          <p:cNvSpPr txBox="1"/>
-          <p:nvPr/>
-        </p:nvSpPr>
-        <p:spPr>
-          <a:xfrm>
-            <a:off x="868680" y="2423160"/>
-            <a:ext cx="9875520" cy="640080"/>
-          </a:xfrm>
-          <a:prstGeom prst="rect">
-            <a:avLst/>
-          </a:prstGeom>
-          <a:noFill/>
-        </p:spPr>
-        <p:txBody>
-          <a:bodyPr wrap="none" lIns="45720" rIns="45720" anchor="t">
-            <a:spAutoFit/>
-          </a:bodyPr>
-          <a:lstStyle/>
-          <a:p>
-            <a:pPr>
-              <a:spcAft>
-                <a:spcPts val="700"/>
-              </a:spcAft>
-              <a:defRPr sz="1800" b="0">
-                <a:solidFill>
-                  <a:srgbClr val="DAE5F4"/>
-                </a:solidFill>
-                <a:latin typeface="Aptos"/>
-              </a:defRPr>
-            </a:pPr>
-            <a:r>
-              <a:t>Click the link below to open the running application.</a:t>
-            </a:r>
-          </a:p>
-        </p:txBody>
-      </p:sp>
-      <p:sp>
-        <p:nvSpPr>
-          <p:cNvPr id="5" name="TextBox 4"/>
-          <p:cNvSpPr txBox="1"/>
-          <p:nvPr/>
-        </p:nvSpPr>
-        <p:spPr>
-          <a:xfrm>
-            <a:off x="868680" y="3337560"/>
-            <a:ext cx="9875520" cy="502920"/>
-          </a:xfrm>
-          <a:prstGeom prst="rect">
-            <a:avLst/>
-          </a:prstGeom>
-          <a:noFill/>
-        </p:spPr>
-        <p:txBody>
-          <a:bodyPr wrap="none" lIns="45720" rIns="45720" anchor="t">
-            <a:spAutoFit/>
-          </a:bodyPr>
-          <a:lstStyle/>
-          <a:p>
-            <a:pPr>
-              <a:spcAft>
-                <a:spcPts val="700"/>
-              </a:spcAft>
-              <a:defRPr sz="2000" b="1">
-                <a:solidFill>
-                  <a:srgbClr val="89C4FF"/>
-                </a:solidFill>
-                <a:latin typeface="Aptos"/>
-              </a:defRPr>
-            </a:pPr>
-            <a:r>
-              <a:rPr>
-                <a:hlinkClick r:id="rId2"/>
-              </a:rPr>
-              <a:t>http://127.0.0.1:8000/</a:t>
-            </a:r>
-          </a:p>
-        </p:txBody>
-      </p:sp>
-      <p:sp>
-        <p:nvSpPr>
-          <p:cNvPr id="6" name="Rounded Rectangle 5"/>
+          <p:cNvPr id="2" name="Rectangle 1"/>
           <p:cNvSpPr/>
           <p:nvPr/>
         </p:nvSpPr>
         <p:spPr>
           <a:xfrm>
-            <a:off x="868680" y="4160520"/>
-            <a:ext cx="10287000" cy="1051560"/>
-          </a:xfrm>
-          <a:prstGeom prst="roundRect">
-            <a:avLst>
-              <a:gd name="adj" fmla="val 12000"/>
-            </a:avLst>
+            <a:off x="0" y="0"/>
+            <a:ext cx="164592" cy="6858000"/>
+          </a:xfrm>
+          <a:prstGeom prst="rect">
+            <a:avLst/>
           </a:prstGeom>
           <a:solidFill>
-            <a:srgbClr val="203656"/>
+            <a:srgbClr val="1F9D94"/>
           </a:solidFill>
           <a:ln>
-            <a:solidFill>
-              <a:srgbClr val="203656"/>
-            </a:solidFill>
+            <a:noFill/>
           </a:ln>
         </p:spPr>
         <p:style>
@@ -12962,59 +14740,200 @@
       </p:sp>
       <p:sp>
         <p:nvSpPr>
-          <p:cNvPr id="7" name="TextBox 6"/>
-          <p:cNvSpPr txBox="1"/>
-          <p:nvPr/>
-        </p:nvSpPr>
-        <p:spPr>
-          <a:xfrm>
-            <a:off x="1097280" y="4370832"/>
-            <a:ext cx="9728304" cy="582211"/>
-          </a:xfrm>
-          <a:prstGeom prst="rect">
-            <a:avLst/>
-          </a:prstGeom>
-          <a:noFill/>
-        </p:spPr>
-        <p:txBody>
-          <a:bodyPr wrap="none" lIns="45720" rIns="45720" anchor="t">
-            <a:spAutoFit/>
-          </a:bodyPr>
-          <a:lstStyle/>
-          <a:p>
-            <a:pPr>
-              <a:spcAft>
-                <a:spcPts val="700"/>
-              </a:spcAft>
-              <a:defRPr sz="1300" b="0">
+          <p:cNvPr id="3" name="Rounded Rectangle 2"/>
+          <p:cNvSpPr/>
+          <p:nvPr/>
+        </p:nvSpPr>
+        <p:spPr>
+          <a:xfrm>
+            <a:off x="658368" y="475488"/>
+            <a:ext cx="3154680" cy="310896"/>
+          </a:xfrm>
+          <a:prstGeom prst="roundRect">
+            <a:avLst>
+              <a:gd name="adj" fmla="val 12000"/>
+            </a:avLst>
+          </a:prstGeom>
+          <a:solidFill>
+            <a:srgbClr val="1F9D94"/>
+          </a:solidFill>
+          <a:ln>
+            <a:noFill/>
+          </a:ln>
+        </p:spPr>
+        <p:style>
+          <a:lnRef idx="1">
+            <a:schemeClr val="accent1"/>
+          </a:lnRef>
+          <a:fillRef idx="3">
+            <a:schemeClr val="accent1"/>
+          </a:fillRef>
+          <a:effectRef idx="2">
+            <a:schemeClr val="accent1"/>
+          </a:effectRef>
+          <a:fontRef idx="minor">
+            <a:schemeClr val="lt1"/>
+          </a:fontRef>
+        </p:style>
+        <p:txBody>
+          <a:bodyPr rtlCol="0" anchor="ctr"/>
+          <a:lstStyle/>
+          <a:p>
+            <a:pPr algn="ctr"/>
+            <a:endParaRPr/>
+          </a:p>
+        </p:txBody>
+      </p:sp>
+      <p:sp>
+        <p:nvSpPr>
+          <p:cNvPr id="4" name="TextBox 3"/>
+          <p:cNvSpPr txBox="1"/>
+          <p:nvPr/>
+        </p:nvSpPr>
+        <p:spPr>
+          <a:xfrm>
+            <a:off x="722376" y="489204"/>
+            <a:ext cx="3026664" cy="265176"/>
+          </a:xfrm>
+          <a:prstGeom prst="rect">
+            <a:avLst/>
+          </a:prstGeom>
+          <a:noFill/>
+        </p:spPr>
+        <p:txBody>
+          <a:bodyPr wrap="square" lIns="9144" tIns="9144" rIns="9144" bIns="9144" anchor="ctr">
+            <a:spAutoFit/>
+          </a:bodyPr>
+          <a:lstStyle/>
+          <a:p>
+            <a:pPr algn="ctr"/>
+            <a:r>
+              <a:rPr sz="1000" b="1" i="0">
                 <a:solidFill>
                   <a:srgbClr val="FFFFFF"/>
                 </a:solidFill>
                 <a:latin typeface="Aptos"/>
-              </a:defRPr>
-            </a:pPr>
-            <a:r>
-              <a:rPr dirty="0"/>
-              <a:t>Important: 127.0.0.1 is a local address. This link works only on the computer running the app, while the server is on.</a:t>
-            </a:r>
-            <a:endParaRPr lang="en-US" dirty="0"/>
-          </a:p>
-          <a:p>
-            <a:pPr>
-              <a:spcAft>
-                <a:spcPts val="700"/>
-              </a:spcAft>
-              <a:defRPr sz="1300" b="0">
+              </a:rPr>
+              <a:t>GROUP 14  •  DISASTER MANAGEMENT</a:t>
+            </a:r>
+          </a:p>
+        </p:txBody>
+      </p:sp>
+      <p:sp>
+        <p:nvSpPr>
+          <p:cNvPr id="5" name="TextBox 4"/>
+          <p:cNvSpPr txBox="1"/>
+          <p:nvPr/>
+        </p:nvSpPr>
+        <p:spPr>
+          <a:xfrm>
+            <a:off x="658368" y="932688"/>
+            <a:ext cx="10424160" cy="658368"/>
+          </a:xfrm>
+          <a:prstGeom prst="rect">
+            <a:avLst/>
+          </a:prstGeom>
+          <a:noFill/>
+        </p:spPr>
+        <p:txBody>
+          <a:bodyPr wrap="square" lIns="36576" tIns="36576" rIns="36576" bIns="36576" anchor="ctr">
+            <a:spAutoFit/>
+          </a:bodyPr>
+          <a:lstStyle/>
+          <a:p>
+            <a:pPr algn="l"/>
+            <a:r>
+              <a:rPr sz="3100" b="1" i="0">
                 <a:solidFill>
                   <a:srgbClr val="FFFFFF"/>
                 </a:solidFill>
                 <a:latin typeface="Aptos"/>
-              </a:defRPr>
-            </a:pPr>
-            <a:r>
-              <a:rPr dirty="0"/>
-              <a:t> To let a professor open it from another device, deploy the app to a public hosting service and replace this hyperlink with the public URL.</a:t>
-            </a:r>
+              </a:rPr>
+              <a:t>LIVE DEMONSTRATION</a:t>
+            </a:r>
+          </a:p>
+        </p:txBody>
+      </p:sp>
+      <p:sp>
+        <p:nvSpPr>
+          <p:cNvPr id="6" name="TextBox 5"/>
+          <p:cNvSpPr txBox="1"/>
+          <p:nvPr/>
+        </p:nvSpPr>
+        <p:spPr>
+          <a:xfrm>
+            <a:off x="694944" y="1627632"/>
+            <a:ext cx="9875520" cy="384048"/>
+          </a:xfrm>
+          <a:prstGeom prst="rect">
+            <a:avLst/>
+          </a:prstGeom>
+          <a:noFill/>
+        </p:spPr>
+        <p:txBody>
+          <a:bodyPr wrap="square" lIns="36576" tIns="36576" rIns="36576" bIns="36576" anchor="ctr">
+            <a:spAutoFit/>
+          </a:bodyPr>
+          <a:lstStyle/>
+          <a:p>
+            <a:pPr algn="l"/>
+            <a:r>
+              <a:rPr sz="1600" b="0" i="0">
+                <a:solidFill>
+                  <a:srgbClr val="C5D5EC"/>
+                </a:solidFill>
+                <a:latin typeface="Aptos"/>
+              </a:rPr>
+              <a:t>Explore the working Disaster Relief Distribution Optimizer</a:t>
+            </a:r>
+          </a:p>
+        </p:txBody>
+      </p:sp>
+      <p:sp>
+        <p:nvSpPr>
+          <p:cNvPr id="7" name="Rounded Rectangle 6"/>
+          <p:cNvSpPr/>
+          <p:nvPr/>
+        </p:nvSpPr>
+        <p:spPr>
+          <a:xfrm>
+            <a:off x="658368" y="2267712"/>
+            <a:ext cx="10808208" cy="1261872"/>
+          </a:xfrm>
+          <a:prstGeom prst="roundRect">
+            <a:avLst>
+              <a:gd name="adj" fmla="val 12000"/>
+            </a:avLst>
+          </a:prstGeom>
+          <a:solidFill>
+            <a:srgbClr val="1C3353"/>
+          </a:solidFill>
+          <a:ln>
+            <a:solidFill>
+              <a:srgbClr val="37527A"/>
+            </a:solidFill>
+          </a:ln>
+        </p:spPr>
+        <p:style>
+          <a:lnRef idx="1">
+            <a:schemeClr val="accent1"/>
+          </a:lnRef>
+          <a:fillRef idx="3">
+            <a:schemeClr val="accent1"/>
+          </a:fillRef>
+          <a:effectRef idx="2">
+            <a:schemeClr val="accent1"/>
+          </a:effectRef>
+          <a:fontRef idx="minor">
+            <a:schemeClr val="lt1"/>
+          </a:fontRef>
+        </p:style>
+        <p:txBody>
+          <a:bodyPr rtlCol="0" anchor="ctr"/>
+          <a:lstStyle/>
+          <a:p>
+            <a:pPr algn="ctr"/>
+            <a:endParaRPr/>
           </a:p>
         </p:txBody>
       </p:sp>
@@ -13026,33 +14945,29 @@
         </p:nvSpPr>
         <p:spPr>
           <a:xfrm>
-            <a:off x="868680" y="5897880"/>
-            <a:ext cx="9875520" cy="274320"/>
-          </a:xfrm>
-          <a:prstGeom prst="rect">
-            <a:avLst/>
-          </a:prstGeom>
-          <a:noFill/>
-        </p:spPr>
-        <p:txBody>
-          <a:bodyPr wrap="none" lIns="45720" rIns="45720" anchor="t">
-            <a:spAutoFit/>
-          </a:bodyPr>
-          <a:lstStyle/>
-          <a:p>
-            <a:pPr>
-              <a:spcAft>
-                <a:spcPts val="700"/>
-              </a:spcAft>
-              <a:defRPr sz="1200" b="0">
-                <a:solidFill>
-                  <a:srgbClr val="BECDE1"/>
-                </a:solidFill>
-                <a:latin typeface="Aptos"/>
-              </a:defRPr>
-            </a:pPr>
-            <a:r>
-              <a:t>Demo tip: start the backend in VS Code, then click the link.</a:t>
+            <a:off x="932688" y="2468880"/>
+            <a:ext cx="2286000" cy="274320"/>
+          </a:xfrm>
+          <a:prstGeom prst="rect">
+            <a:avLst/>
+          </a:prstGeom>
+          <a:noFill/>
+        </p:spPr>
+        <p:txBody>
+          <a:bodyPr wrap="square" lIns="36576" tIns="36576" rIns="36576" bIns="36576" anchor="ctr">
+            <a:spAutoFit/>
+          </a:bodyPr>
+          <a:lstStyle/>
+          <a:p>
+            <a:pPr algn="l"/>
+            <a:r>
+              <a:rPr sz="1200" b="1" i="0">
+                <a:solidFill>
+                  <a:srgbClr val="1F9D94"/>
+                </a:solidFill>
+                <a:latin typeface="Aptos"/>
+              </a:rPr>
+              <a:t>OPEN THE WEB APP</a:t>
             </a:r>
           </a:p>
         </p:txBody>
@@ -13065,38 +14980,598 @@
         </p:nvSpPr>
         <p:spPr>
           <a:xfrm>
-            <a:off x="11201400" y="6473952"/>
-            <a:ext cx="457200" cy="182880"/>
-          </a:xfrm>
-          <a:prstGeom prst="rect">
-            <a:avLst/>
-          </a:prstGeom>
-          <a:noFill/>
-        </p:spPr>
-        <p:txBody>
-          <a:bodyPr wrap="none" lIns="45720" rIns="45720" anchor="t">
-            <a:spAutoFit/>
-          </a:bodyPr>
-          <a:lstStyle/>
-          <a:p>
-            <a:pPr algn="r">
-              <a:spcAft>
-                <a:spcPts val="700"/>
-              </a:spcAft>
-              <a:defRPr sz="1000" b="0">
-                <a:solidFill>
-                  <a:srgbClr val="BECDE1"/>
-                </a:solidFill>
-                <a:latin typeface="Aptos"/>
-              </a:defRPr>
-            </a:pPr>
-            <a:r>
+            <a:off x="932688" y="2761488"/>
+            <a:ext cx="9875520" cy="411480"/>
+          </a:xfrm>
+          <a:prstGeom prst="rect">
+            <a:avLst/>
+          </a:prstGeom>
+          <a:noFill/>
+        </p:spPr>
+        <p:txBody>
+          <a:bodyPr wrap="square" lIns="36576" tIns="36576" rIns="36576" bIns="36576" anchor="ctr">
+            <a:spAutoFit/>
+          </a:bodyPr>
+          <a:lstStyle/>
+          <a:p>
+            <a:pPr algn="l"/>
+            <a:r>
+              <a:rPr sz="1900" b="1" i="0">
+                <a:solidFill>
+                  <a:srgbClr val="FFFFFF"/>
+                </a:solidFill>
+                <a:latin typeface="Aptos"/>
+                <a:hlinkClick r:id="rId2"/>
+              </a:rPr>
+              <a:t>https://disaster-relief-optimizer-m8hg.onrender.com</a:t>
+            </a:r>
+          </a:p>
+        </p:txBody>
+      </p:sp>
+      <p:sp>
+        <p:nvSpPr>
+          <p:cNvPr id="10" name="TextBox 9"/>
+          <p:cNvSpPr txBox="1"/>
+          <p:nvPr/>
+        </p:nvSpPr>
+        <p:spPr>
+          <a:xfrm>
+            <a:off x="749808" y="3675887"/>
+            <a:ext cx="10424160" cy="438912"/>
+          </a:xfrm>
+          <a:prstGeom prst="rect">
+            <a:avLst/>
+          </a:prstGeom>
+          <a:noFill/>
+        </p:spPr>
+        <p:txBody>
+          <a:bodyPr wrap="square" lIns="36576" tIns="36576" rIns="36576" bIns="36576" anchor="ctr">
+            <a:spAutoFit/>
+          </a:bodyPr>
+          <a:lstStyle/>
+          <a:p>
+            <a:pPr algn="l"/>
+            <a:r>
+              <a:rPr sz="1400" b="0" i="0">
+                <a:solidFill>
+                  <a:srgbClr val="C5D5EC"/>
+                </a:solidFill>
+                <a:latin typeface="Aptos"/>
+              </a:rPr>
+              <a:t>Use the sample scenario, edit inputs, then run the optimizer to inspect the shipment plan.</a:t>
+            </a:r>
+          </a:p>
+        </p:txBody>
+      </p:sp>
+      <p:sp>
+        <p:nvSpPr>
+          <p:cNvPr id="11" name="Rounded Rectangle 10"/>
+          <p:cNvSpPr/>
+          <p:nvPr/>
+        </p:nvSpPr>
+        <p:spPr>
+          <a:xfrm>
+            <a:off x="713232" y="4343400"/>
+            <a:ext cx="3246120" cy="1024128"/>
+          </a:xfrm>
+          <a:prstGeom prst="roundRect">
+            <a:avLst>
+              <a:gd name="adj" fmla="val 12000"/>
+            </a:avLst>
+          </a:prstGeom>
+          <a:solidFill>
+            <a:srgbClr val="EFF5FC"/>
+          </a:solidFill>
+          <a:ln>
+            <a:noFill/>
+          </a:ln>
+        </p:spPr>
+        <p:style>
+          <a:lnRef idx="1">
+            <a:schemeClr val="accent1"/>
+          </a:lnRef>
+          <a:fillRef idx="3">
+            <a:schemeClr val="accent1"/>
+          </a:fillRef>
+          <a:effectRef idx="2">
+            <a:schemeClr val="accent1"/>
+          </a:effectRef>
+          <a:fontRef idx="minor">
+            <a:schemeClr val="lt1"/>
+          </a:fontRef>
+        </p:style>
+        <p:txBody>
+          <a:bodyPr rtlCol="0" anchor="ctr"/>
+          <a:lstStyle/>
+          <a:p>
+            <a:pPr algn="ctr"/>
+            <a:endParaRPr/>
+          </a:p>
+        </p:txBody>
+      </p:sp>
+      <p:sp>
+        <p:nvSpPr>
+          <p:cNvPr id="12" name="TextBox 11"/>
+          <p:cNvSpPr txBox="1"/>
+          <p:nvPr/>
+        </p:nvSpPr>
+        <p:spPr>
+          <a:xfrm>
+            <a:off x="859536" y="4480560"/>
+            <a:ext cx="475488" cy="292608"/>
+          </a:xfrm>
+          <a:prstGeom prst="rect">
+            <a:avLst/>
+          </a:prstGeom>
+          <a:noFill/>
+        </p:spPr>
+        <p:txBody>
+          <a:bodyPr wrap="square" lIns="36576" tIns="36576" rIns="36576" bIns="36576" anchor="ctr">
+            <a:spAutoFit/>
+          </a:bodyPr>
+          <a:lstStyle/>
+          <a:p>
+            <a:pPr algn="l"/>
+            <a:r>
+              <a:rPr sz="1400" b="1" i="0">
+                <a:solidFill>
+                  <a:srgbClr val="2A62DC"/>
+                </a:solidFill>
+                <a:latin typeface="Aptos"/>
+              </a:rPr>
+              <a:t>01</a:t>
+            </a:r>
+          </a:p>
+        </p:txBody>
+      </p:sp>
+      <p:sp>
+        <p:nvSpPr>
+          <p:cNvPr id="13" name="TextBox 12"/>
+          <p:cNvSpPr txBox="1"/>
+          <p:nvPr/>
+        </p:nvSpPr>
+        <p:spPr>
+          <a:xfrm>
+            <a:off x="1353312" y="4462272"/>
+            <a:ext cx="2331720" cy="310896"/>
+          </a:xfrm>
+          <a:prstGeom prst="rect">
+            <a:avLst/>
+          </a:prstGeom>
+          <a:noFill/>
+        </p:spPr>
+        <p:txBody>
+          <a:bodyPr wrap="square" lIns="36576" tIns="36576" rIns="36576" bIns="36576" anchor="ctr">
+            <a:spAutoFit/>
+          </a:bodyPr>
+          <a:lstStyle/>
+          <a:p>
+            <a:pPr algn="l"/>
+            <a:r>
+              <a:rPr sz="1700" b="1" i="0">
+                <a:solidFill>
+                  <a:srgbClr val="132642"/>
+                </a:solidFill>
+                <a:latin typeface="Aptos"/>
+              </a:rPr>
+              <a:t>Configure</a:t>
+            </a:r>
+          </a:p>
+        </p:txBody>
+      </p:sp>
+      <p:sp>
+        <p:nvSpPr>
+          <p:cNvPr id="14" name="TextBox 13"/>
+          <p:cNvSpPr txBox="1"/>
+          <p:nvPr/>
+        </p:nvSpPr>
+        <p:spPr>
+          <a:xfrm>
+            <a:off x="868680" y="4828032"/>
+            <a:ext cx="2926080" cy="402336"/>
+          </a:xfrm>
+          <a:prstGeom prst="rect">
+            <a:avLst/>
+          </a:prstGeom>
+          <a:noFill/>
+        </p:spPr>
+        <p:txBody>
+          <a:bodyPr wrap="square" lIns="36576" tIns="36576" rIns="36576" bIns="36576" anchor="ctr">
+            <a:spAutoFit/>
+          </a:bodyPr>
+          <a:lstStyle/>
+          <a:p>
+            <a:pPr algn="l"/>
+            <a:r>
+              <a:rPr sz="1100" b="0" i="0">
+                <a:solidFill>
+                  <a:srgbClr val="53657C"/>
+                </a:solidFill>
+                <a:latin typeface="Aptos"/>
+              </a:rPr>
+              <a:t>Set supplies, demand, priorities and transport costs.</a:t>
+            </a:r>
+          </a:p>
+        </p:txBody>
+      </p:sp>
+      <p:sp>
+        <p:nvSpPr>
+          <p:cNvPr id="15" name="Rounded Rectangle 14"/>
+          <p:cNvSpPr/>
+          <p:nvPr/>
+        </p:nvSpPr>
+        <p:spPr>
+          <a:xfrm>
+            <a:off x="4224528" y="4343400"/>
+            <a:ext cx="3246120" cy="1024128"/>
+          </a:xfrm>
+          <a:prstGeom prst="roundRect">
+            <a:avLst>
+              <a:gd name="adj" fmla="val 12000"/>
+            </a:avLst>
+          </a:prstGeom>
+          <a:solidFill>
+            <a:srgbClr val="EFF5FC"/>
+          </a:solidFill>
+          <a:ln>
+            <a:noFill/>
+          </a:ln>
+        </p:spPr>
+        <p:style>
+          <a:lnRef idx="1">
+            <a:schemeClr val="accent1"/>
+          </a:lnRef>
+          <a:fillRef idx="3">
+            <a:schemeClr val="accent1"/>
+          </a:fillRef>
+          <a:effectRef idx="2">
+            <a:schemeClr val="accent1"/>
+          </a:effectRef>
+          <a:fontRef idx="minor">
+            <a:schemeClr val="lt1"/>
+          </a:fontRef>
+        </p:style>
+        <p:txBody>
+          <a:bodyPr rtlCol="0" anchor="ctr"/>
+          <a:lstStyle/>
+          <a:p>
+            <a:pPr algn="ctr"/>
+            <a:endParaRPr/>
+          </a:p>
+        </p:txBody>
+      </p:sp>
+      <p:sp>
+        <p:nvSpPr>
+          <p:cNvPr id="16" name="TextBox 15"/>
+          <p:cNvSpPr txBox="1"/>
+          <p:nvPr/>
+        </p:nvSpPr>
+        <p:spPr>
+          <a:xfrm>
+            <a:off x="4370832" y="4480560"/>
+            <a:ext cx="475488" cy="292608"/>
+          </a:xfrm>
+          <a:prstGeom prst="rect">
+            <a:avLst/>
+          </a:prstGeom>
+          <a:noFill/>
+        </p:spPr>
+        <p:txBody>
+          <a:bodyPr wrap="square" lIns="36576" tIns="36576" rIns="36576" bIns="36576" anchor="ctr">
+            <a:spAutoFit/>
+          </a:bodyPr>
+          <a:lstStyle/>
+          <a:p>
+            <a:pPr algn="l"/>
+            <a:r>
+              <a:rPr sz="1400" b="1" i="0">
+                <a:solidFill>
+                  <a:srgbClr val="2A62DC"/>
+                </a:solidFill>
+                <a:latin typeface="Aptos"/>
+              </a:rPr>
+              <a:t>02</a:t>
+            </a:r>
+          </a:p>
+        </p:txBody>
+      </p:sp>
+      <p:sp>
+        <p:nvSpPr>
+          <p:cNvPr id="17" name="TextBox 16"/>
+          <p:cNvSpPr txBox="1"/>
+          <p:nvPr/>
+        </p:nvSpPr>
+        <p:spPr>
+          <a:xfrm>
+            <a:off x="4864608" y="4462272"/>
+            <a:ext cx="2331720" cy="310896"/>
+          </a:xfrm>
+          <a:prstGeom prst="rect">
+            <a:avLst/>
+          </a:prstGeom>
+          <a:noFill/>
+        </p:spPr>
+        <p:txBody>
+          <a:bodyPr wrap="square" lIns="36576" tIns="36576" rIns="36576" bIns="36576" anchor="ctr">
+            <a:spAutoFit/>
+          </a:bodyPr>
+          <a:lstStyle/>
+          <a:p>
+            <a:pPr algn="l"/>
+            <a:r>
+              <a:rPr sz="1700" b="1" i="0">
+                <a:solidFill>
+                  <a:srgbClr val="132642"/>
+                </a:solidFill>
+                <a:latin typeface="Aptos"/>
+              </a:rPr>
+              <a:t>Optimize</a:t>
+            </a:r>
+          </a:p>
+        </p:txBody>
+      </p:sp>
+      <p:sp>
+        <p:nvSpPr>
+          <p:cNvPr id="18" name="TextBox 17"/>
+          <p:cNvSpPr txBox="1"/>
+          <p:nvPr/>
+        </p:nvSpPr>
+        <p:spPr>
+          <a:xfrm>
+            <a:off x="4379976" y="4828032"/>
+            <a:ext cx="2926080" cy="402336"/>
+          </a:xfrm>
+          <a:prstGeom prst="rect">
+            <a:avLst/>
+          </a:prstGeom>
+          <a:noFill/>
+        </p:spPr>
+        <p:txBody>
+          <a:bodyPr wrap="square" lIns="36576" tIns="36576" rIns="36576" bIns="36576" anchor="ctr">
+            <a:spAutoFit/>
+          </a:bodyPr>
+          <a:lstStyle/>
+          <a:p>
+            <a:pPr algn="l"/>
+            <a:r>
+              <a:rPr sz="1100" b="0" i="0">
+                <a:solidFill>
+                  <a:srgbClr val="53657C"/>
+                </a:solidFill>
+                <a:latin typeface="Aptos"/>
+              </a:rPr>
+              <a:t>Run the model to calculate a shipment plan.</a:t>
+            </a:r>
+          </a:p>
+        </p:txBody>
+      </p:sp>
+      <p:sp>
+        <p:nvSpPr>
+          <p:cNvPr id="19" name="Rounded Rectangle 18"/>
+          <p:cNvSpPr/>
+          <p:nvPr/>
+        </p:nvSpPr>
+        <p:spPr>
+          <a:xfrm>
+            <a:off x="7735823" y="4343400"/>
+            <a:ext cx="3246120" cy="1024128"/>
+          </a:xfrm>
+          <a:prstGeom prst="roundRect">
+            <a:avLst>
+              <a:gd name="adj" fmla="val 12000"/>
+            </a:avLst>
+          </a:prstGeom>
+          <a:solidFill>
+            <a:srgbClr val="EFF5FC"/>
+          </a:solidFill>
+          <a:ln>
+            <a:noFill/>
+          </a:ln>
+        </p:spPr>
+        <p:style>
+          <a:lnRef idx="1">
+            <a:schemeClr val="accent1"/>
+          </a:lnRef>
+          <a:fillRef idx="3">
+            <a:schemeClr val="accent1"/>
+          </a:fillRef>
+          <a:effectRef idx="2">
+            <a:schemeClr val="accent1"/>
+          </a:effectRef>
+          <a:fontRef idx="minor">
+            <a:schemeClr val="lt1"/>
+          </a:fontRef>
+        </p:style>
+        <p:txBody>
+          <a:bodyPr rtlCol="0" anchor="ctr"/>
+          <a:lstStyle/>
+          <a:p>
+            <a:pPr algn="ctr"/>
+            <a:endParaRPr/>
+          </a:p>
+        </p:txBody>
+      </p:sp>
+      <p:sp>
+        <p:nvSpPr>
+          <p:cNvPr id="20" name="TextBox 19"/>
+          <p:cNvSpPr txBox="1"/>
+          <p:nvPr/>
+        </p:nvSpPr>
+        <p:spPr>
+          <a:xfrm>
+            <a:off x="7882127" y="4480560"/>
+            <a:ext cx="475488" cy="292608"/>
+          </a:xfrm>
+          <a:prstGeom prst="rect">
+            <a:avLst/>
+          </a:prstGeom>
+          <a:noFill/>
+        </p:spPr>
+        <p:txBody>
+          <a:bodyPr wrap="square" lIns="36576" tIns="36576" rIns="36576" bIns="36576" anchor="ctr">
+            <a:spAutoFit/>
+          </a:bodyPr>
+          <a:lstStyle/>
+          <a:p>
+            <a:pPr algn="l"/>
+            <a:r>
+              <a:rPr sz="1400" b="1" i="0">
+                <a:solidFill>
+                  <a:srgbClr val="2A62DC"/>
+                </a:solidFill>
+                <a:latin typeface="Aptos"/>
+              </a:rPr>
+              <a:t>03</a:t>
+            </a:r>
+          </a:p>
+        </p:txBody>
+      </p:sp>
+      <p:sp>
+        <p:nvSpPr>
+          <p:cNvPr id="21" name="TextBox 20"/>
+          <p:cNvSpPr txBox="1"/>
+          <p:nvPr/>
+        </p:nvSpPr>
+        <p:spPr>
+          <a:xfrm>
+            <a:off x="8375903" y="4462272"/>
+            <a:ext cx="2331720" cy="310896"/>
+          </a:xfrm>
+          <a:prstGeom prst="rect">
+            <a:avLst/>
+          </a:prstGeom>
+          <a:noFill/>
+        </p:spPr>
+        <p:txBody>
+          <a:bodyPr wrap="square" lIns="36576" tIns="36576" rIns="36576" bIns="36576" anchor="ctr">
+            <a:spAutoFit/>
+          </a:bodyPr>
+          <a:lstStyle/>
+          <a:p>
+            <a:pPr algn="l"/>
+            <a:r>
+              <a:rPr sz="1700" b="1" i="0">
+                <a:solidFill>
+                  <a:srgbClr val="132642"/>
+                </a:solidFill>
+                <a:latin typeface="Aptos"/>
+              </a:rPr>
+              <a:t>Review</a:t>
+            </a:r>
+          </a:p>
+        </p:txBody>
+      </p:sp>
+      <p:sp>
+        <p:nvSpPr>
+          <p:cNvPr id="22" name="TextBox 21"/>
+          <p:cNvSpPr txBox="1"/>
+          <p:nvPr/>
+        </p:nvSpPr>
+        <p:spPr>
+          <a:xfrm>
+            <a:off x="7891271" y="4828032"/>
+            <a:ext cx="2926080" cy="402336"/>
+          </a:xfrm>
+          <a:prstGeom prst="rect">
+            <a:avLst/>
+          </a:prstGeom>
+          <a:noFill/>
+        </p:spPr>
+        <p:txBody>
+          <a:bodyPr wrap="square" lIns="36576" tIns="36576" rIns="36576" bIns="36576" anchor="ctr">
+            <a:spAutoFit/>
+          </a:bodyPr>
+          <a:lstStyle/>
+          <a:p>
+            <a:pPr algn="l"/>
+            <a:r>
+              <a:rPr sz="1100" b="0" i="0">
+                <a:solidFill>
+                  <a:srgbClr val="53657C"/>
+                </a:solidFill>
+                <a:latin typeface="Aptos"/>
+              </a:rPr>
+              <a:t>Inspect cost, served demand and remaining shortages.</a:t>
+            </a:r>
+          </a:p>
+        </p:txBody>
+      </p:sp>
+      <p:sp>
+        <p:nvSpPr>
+          <p:cNvPr id="23" name="TextBox 22"/>
+          <p:cNvSpPr txBox="1"/>
+          <p:nvPr/>
+        </p:nvSpPr>
+        <p:spPr>
+          <a:xfrm>
+            <a:off x="713232" y="5989320"/>
+            <a:ext cx="10607040" cy="320040"/>
+          </a:xfrm>
+          <a:prstGeom prst="rect">
+            <a:avLst/>
+          </a:prstGeom>
+          <a:noFill/>
+        </p:spPr>
+        <p:txBody>
+          <a:bodyPr wrap="square" lIns="36576" tIns="36576" rIns="36576" bIns="36576" anchor="ctr">
+            <a:spAutoFit/>
+          </a:bodyPr>
+          <a:lstStyle/>
+          <a:p>
+            <a:pPr algn="l"/>
+            <a:r>
+              <a:rPr sz="1100" b="0" i="1">
+                <a:solidFill>
+                  <a:srgbClr val="C5D5EC"/>
+                </a:solidFill>
+                <a:latin typeface="Aptos"/>
+              </a:rPr>
+              <a:t>Prototype demonstration • Outputs depend on the entered data and model assumptions.</a:t>
+            </a:r>
+          </a:p>
+        </p:txBody>
+      </p:sp>
+      <p:sp>
+        <p:nvSpPr>
+          <p:cNvPr id="24" name="TextBox 23"/>
+          <p:cNvSpPr txBox="1"/>
+          <p:nvPr/>
+        </p:nvSpPr>
+        <p:spPr>
+          <a:xfrm>
+            <a:off x="11411712" y="6473952"/>
+            <a:ext cx="256032" cy="182880"/>
+          </a:xfrm>
+          <a:prstGeom prst="rect">
+            <a:avLst/>
+          </a:prstGeom>
+          <a:noFill/>
+        </p:spPr>
+        <p:txBody>
+          <a:bodyPr wrap="square" lIns="36576" tIns="36576" rIns="36576" bIns="36576" anchor="ctr">
+            <a:spAutoFit/>
+          </a:bodyPr>
+          <a:lstStyle/>
+          <a:p>
+            <a:pPr algn="r"/>
+            <a:r>
+              <a:rPr sz="900" b="0" i="0">
+                <a:solidFill>
+                  <a:srgbClr val="C5D5EC"/>
+                </a:solidFill>
+                <a:latin typeface="Aptos"/>
+              </a:rPr>
               <a:t>9</a:t>
             </a:r>
           </a:p>
         </p:txBody>
       </p:sp>
     </p:spTree>
+    <p:extLst>
+      <p:ext uri="{BB962C8B-B14F-4D97-AF65-F5344CB8AC3E}">
+        <p14:creationId xmlns:p14="http://schemas.microsoft.com/office/powerpoint/2010/main" val="1511077130"/>
+      </p:ext>
+    </p:extLst>
   </p:cSld>
   <p:clrMapOvr>
     <a:masterClrMapping/>
